--- a/modulo-02/02.06 - Implementando Verificações de Autorização/02.06_Implementando_verificações_de_autorização.pptx
+++ b/modulo-02/02.06 - Implementando Verificações de Autorização/02.06_Implementando_verificações_de_autorização.pptx
@@ -1550,7 +1550,7 @@
                   <a:srgbClr val="8FA3C7"/>
                 </a:solidFill>
               </a:rPr>
-              <a:t>ABAP Moderno · Módulo 04 — Programação ABAP Intermediária  ·  Aula 6 de 9 — Autorizações</a:t>
+              <a:t>ABAP Moderno · Módulo 02 — Programação ABAP Intermediária  ·  Aula 6 de 9 — Autorizações</a:t>
             </a:r>
             <a:endParaRPr lang="en-US" sz="900" dirty="0"/>
           </a:p>
@@ -1696,7 +1696,7 @@
                   <a:srgbClr val="556B82"/>
                 </a:solidFill>
               </a:rPr>
-              <a:t>ABAP Moderno · Módulo 04 — Programação ABAP Intermediária  ·  Aula 6 de 9 — Autorizações</a:t>
+              <a:t>ABAP Moderno · Módulo 02 — Programação ABAP Intermediária  ·  Aula 6 de 9 — Autorizações</a:t>
             </a:r>
             <a:endParaRPr lang="en-US" sz="900" dirty="0"/>
           </a:p>
@@ -2127,7 +2127,7 @@
                   <a:srgbClr val="89D1FF"/>
                 </a:solidFill>
               </a:rPr>
-              <a:t>MÓDULO 04 · AULA 06 DE 09</a:t>
+              <a:t>MÓDULO 02 · AULA 06 DE 09</a:t>
             </a:r>
             <a:endParaRPr lang="en-US" sz="1400" dirty="0"/>
           </a:p>
@@ -2513,7 +2513,7 @@
                   <a:srgbClr val="8FA3C7"/>
                 </a:solidFill>
               </a:rPr>
-              <a:t>ABAP Moderno · Módulo 04 — Programação ABAP Intermediária · Design System SAP Horizon</a:t>
+              <a:t>ABAP Moderno · Módulo 02 — Programação ABAP Intermediária · Design System SAP Horizon</a:t>
             </a:r>
             <a:endParaRPr lang="en-US" sz="1100" dirty="0"/>
           </a:p>
@@ -3264,7 +3264,7 @@
                   <a:srgbClr val="FFFFFF"/>
                 </a:solidFill>
               </a:rPr>
-              <a:t>O que aprendemos na aula 04.06</a:t>
+              <a:t>O que aprendemos na aula 02.06</a:t>
             </a:r>
             <a:endParaRPr lang="en-US" sz="3200" dirty="0"/>
           </a:p>
@@ -3759,7 +3759,7 @@
                   <a:srgbClr val="89D1FF"/>
                 </a:solidFill>
               </a:rPr>
-              <a:t>Próxima aula · 04.07  </a:t>
+              <a:t>Próxima aula · 02.07  </a:t>
             </a:r>
             <a:r>
               <a:rPr lang="en-US" sz="1500" dirty="0">
@@ -3789,7 +3789,7 @@
         </p:blipFill>
         <p:spPr>
           <a:xfrm>
-            <a:off x="6355080" y="1965960"/>
+            <a:off x="822960" y="1965960"/>
             <a:ext cx="256032" cy="256032"/>
           </a:xfrm>
           <a:prstGeom prst="rect">
@@ -3813,7 +3813,7 @@
         </p:blipFill>
         <p:spPr>
           <a:xfrm>
-            <a:off x="822960" y="1965960"/>
+            <a:off x="6355080" y="1965960"/>
             <a:ext cx="256032" cy="256032"/>
           </a:xfrm>
           <a:prstGeom prst="rect">
@@ -4036,7 +4036,7 @@
                   <a:srgbClr val="1D2D3E"/>
                 </a:solidFill>
               </a:rPr>
-              <a:t>Módulo 04 em 9 aulas: ABAP intermediário</a:t>
+              <a:t>Módulo 02 em 9 aulas: ABAP intermediário</a:t>
             </a:r>
             <a:endParaRPr lang="en-US" sz="2800" dirty="0"/>
           </a:p>
@@ -5618,7 +5618,26 @@
                   <a:srgbClr val="1D2D3E"/>
                 </a:solidFill>
               </a:rPr>
-              <a:t>impedimos que o programa mostre companhias aéreas que o usuário não pode ver e distinguimos "não existe" de "não autorizado".</a:t>
+              <a:t>filtramos a leitura dos clientes pelas UFs autorizadas e checamos a atividade de cada operação do pedido com a classe </a:t>
+            </a:r>
+            <a:r>
+              <a:rPr lang="en-US" sz="1200" dirty="0">
+                <a:solidFill>
+                  <a:srgbClr val="0064D9"/>
+                </a:solidFill>
+                <a:latin typeface="Courier New" pitchFamily="34" charset="0"/>
+                <a:ea typeface="Courier New" pitchFamily="34" charset="-122"/>
+                <a:cs typeface="Courier New" pitchFamily="34" charset="-120"/>
+              </a:rPr>
+              <a:t>ZCL_PC_AUTH</a:t>
+            </a:r>
+            <a:r>
+              <a:rPr lang="en-US" sz="1200" dirty="0">
+                <a:solidFill>
+                  <a:srgbClr val="1D2D3E"/>
+                </a:solidFill>
+              </a:rPr>
+              <a:t> do projeto.</a:t>
             </a:r>
             <a:endParaRPr lang="en-US" sz="1400" dirty="0"/>
           </a:p>
@@ -5640,7 +5659,7 @@
         </p:blipFill>
         <p:spPr>
           <a:xfrm>
-            <a:off x="4328038" y="1847088"/>
+            <a:off x="6583497" y="1847088"/>
             <a:ext cx="347472" cy="347472"/>
           </a:xfrm>
           <a:prstGeom prst="rect">
@@ -5688,7 +5707,7 @@
         </p:blipFill>
         <p:spPr>
           <a:xfrm>
-            <a:off x="6583497" y="1847088"/>
+            <a:off x="4328038" y="1847088"/>
             <a:ext cx="347472" cy="347472"/>
           </a:xfrm>
           <a:prstGeom prst="rect">
@@ -5712,7 +5731,7 @@
         </p:blipFill>
         <p:spPr>
           <a:xfrm>
-            <a:off x="8838956" y="1847088"/>
+            <a:off x="2072579" y="3858768"/>
             <a:ext cx="347472" cy="347472"/>
           </a:xfrm>
           <a:prstGeom prst="rect">
@@ -5736,7 +5755,7 @@
         </p:blipFill>
         <p:spPr>
           <a:xfrm>
-            <a:off x="2072579" y="3858768"/>
+            <a:off x="8838956" y="1847088"/>
             <a:ext cx="347472" cy="347472"/>
           </a:xfrm>
           <a:prstGeom prst="rect">
@@ -5784,7 +5803,7 @@
         </p:blipFill>
         <p:spPr>
           <a:xfrm>
-            <a:off x="4328038" y="3858768"/>
+            <a:off x="6583497" y="3858768"/>
             <a:ext cx="347472" cy="347472"/>
           </a:xfrm>
           <a:prstGeom prst="rect">
@@ -5808,7 +5827,7 @@
         </p:blipFill>
         <p:spPr>
           <a:xfrm>
-            <a:off x="6583497" y="3858768"/>
+            <a:off x="4328038" y="3858768"/>
             <a:ext cx="347472" cy="347472"/>
           </a:xfrm>
           <a:prstGeom prst="rect">
@@ -6776,7 +6795,7 @@
         </p:blipFill>
         <p:spPr>
           <a:xfrm>
-            <a:off x="820034" y="3928994"/>
+            <a:off x="6481542" y="3928994"/>
             <a:ext cx="225308" cy="225308"/>
           </a:xfrm>
           <a:prstGeom prst="rect">
@@ -6800,8 +6819,8 @@
         </p:blipFill>
         <p:spPr>
           <a:xfrm>
-            <a:off x="10227678" y="2084832"/>
-            <a:ext cx="365760" cy="365760"/>
+            <a:off x="820034" y="3928994"/>
+            <a:ext cx="225308" cy="225308"/>
           </a:xfrm>
           <a:prstGeom prst="rect">
             <a:avLst/>
@@ -6824,8 +6843,8 @@
         </p:blipFill>
         <p:spPr>
           <a:xfrm>
-            <a:off x="6481542" y="3928994"/>
-            <a:ext cx="225308" cy="225308"/>
+            <a:off x="10227678" y="2084832"/>
+            <a:ext cx="365760" cy="365760"/>
           </a:xfrm>
           <a:prstGeom prst="rect">
             <a:avLst/>
@@ -6954,7 +6973,7 @@
                   <a:srgbClr val="89D1FF"/>
                 </a:solidFill>
               </a:rPr>
-              <a:t>AULA 04.06 · SEÇÃO 1</a:t>
+              <a:t>AULA 02.06 · SEÇÃO 1</a:t>
             </a:r>
             <a:endParaRPr lang="en-US" sz="1300" dirty="0"/>
           </a:p>
@@ -7163,7 +7182,7 @@
                   <a:srgbClr val="D1EFFF"/>
                 </a:solidFill>
               </a:rPr>
-              <a:t>  ex.: /DMO/TRVL</a:t>
+              <a:t>  ex.: ZPC_PEDIDO</a:t>
             </a:r>
             <a:endParaRPr lang="en-US" sz="1400" dirty="0"/>
           </a:p>
@@ -7210,7 +7229,7 @@
                   <a:srgbClr val="D1EFFF"/>
                 </a:solidFill>
               </a:rPr>
-              <a:t>  ex.: /DMO/CNTRY</a:t>
+              <a:t>  ex.: ACTVT, ZPC_UF</a:t>
             </a:r>
             <a:endParaRPr lang="en-US" sz="1400" dirty="0"/>
           </a:p>
@@ -7641,7 +7660,7 @@
                             <a:srgbClr val="1D2D3E"/>
                           </a:solidFill>
                         </a:rPr>
-                        <a:t>Um aspecto a proteger, ligado a um data element (ex.: país </a:t>
+                        <a:t>Um aspecto a proteger, ligado a um data element (ex.: UF do cliente, </a:t>
                       </a:r>
                       <a:r>
                         <a:rPr lang="en-US" sz="1100" dirty="0">
@@ -7652,7 +7671,7 @@
                           <a:ea typeface="Courier New" pitchFamily="34" charset="-122"/>
                           <a:cs typeface="Courier New" pitchFamily="34" charset="-120"/>
                         </a:rPr>
-                        <a:t>/DMO/CNTRY</a:t>
+                        <a:t>ZPC_UF</a:t>
                       </a:r>
                       <a:r>
                         <a:rPr lang="en-US" sz="1100" dirty="0">
@@ -7759,7 +7778,7 @@
                           <a:ea typeface="Courier New" pitchFamily="34" charset="-122"/>
                           <a:cs typeface="Courier New" pitchFamily="34" charset="-120"/>
                         </a:rPr>
-                        <a:t>/DMO/TRVL</a:t>
+                        <a:t>ZPC_PEDIDO</a:t>
                       </a:r>
                       <a:r>
                         <a:rPr lang="en-US" sz="1100" dirty="0">
@@ -7767,7 +7786,26 @@
                             <a:srgbClr val="1D2D3E"/>
                           </a:solidFill>
                         </a:rPr>
-                        <a:t>)</a:t>
+                        <a:t> e </a:t>
+                      </a:r>
+                      <a:r>
+                        <a:rPr lang="en-US" sz="1100" dirty="0">
+                          <a:solidFill>
+                            <a:srgbClr val="0064D9"/>
+                          </a:solidFill>
+                          <a:latin typeface="Courier New" pitchFamily="34" charset="0"/>
+                          <a:ea typeface="Courier New" pitchFamily="34" charset="-122"/>
+                          <a:cs typeface="Courier New" pitchFamily="34" charset="-120"/>
+                        </a:rPr>
+                        <a:t>ZPC_ADMIN</a:t>
+                      </a:r>
+                      <a:r>
+                        <a:rPr lang="en-US" sz="1100" dirty="0">
+                          <a:solidFill>
+                            <a:srgbClr val="1D2D3E"/>
+                          </a:solidFill>
+                        </a:rPr>
+                        <a:t> do projeto)</a:t>
                       </a:r>
                       <a:endParaRPr lang="en-US" sz="1200" dirty="0"/>
                     </a:p>
@@ -7855,7 +7893,7 @@
                             <a:srgbClr val="1D2D3E"/>
                           </a:solidFill>
                         </a:rPr>
-                        <a:t>Campo padrão de atividade: 01 criar, 02 alterar, 03 exibir, 06 apagar</a:t>
+                        <a:t>Campo padrão de atividade: 01 criar, 02 alterar, 03 exibir, 06 apagar, 16 executar</a:t>
                       </a:r>
                       <a:endParaRPr lang="en-US" sz="1200" dirty="0"/>
                     </a:p>
@@ -7943,7 +7981,26 @@
                             <a:srgbClr val="1D2D3E"/>
                           </a:solidFill>
                         </a:rPr>
-                        <a:t>Valores concretos, ex.: país DE com atividade 03</a:t>
+                        <a:t>Valores concretos, ex.: </a:t>
+                      </a:r>
+                      <a:r>
+                        <a:rPr lang="en-US" sz="1100" dirty="0">
+                          <a:solidFill>
+                            <a:srgbClr val="0064D9"/>
+                          </a:solidFill>
+                          <a:latin typeface="Courier New" pitchFamily="34" charset="0"/>
+                          <a:ea typeface="Courier New" pitchFamily="34" charset="-122"/>
+                          <a:cs typeface="Courier New" pitchFamily="34" charset="-120"/>
+                        </a:rPr>
+                        <a:t>ZPC_PEDIDO</a:t>
+                      </a:r>
+                      <a:r>
+                        <a:rPr lang="en-US" sz="1100" dirty="0">
+                          <a:solidFill>
+                            <a:srgbClr val="1D2D3E"/>
+                          </a:solidFill>
+                        </a:rPr>
+                        <a:t> com atividade 03</a:t>
                       </a:r>
                       <a:endParaRPr lang="en-US" sz="1200" dirty="0"/>
                     </a:p>
@@ -8047,6 +8104,44 @@
                             <a:srgbClr val="1D2D3E"/>
                           </a:solidFill>
                         </a:rPr>
+                        <a:t>; no projeto, </a:t>
+                      </a:r>
+                      <a:r>
+                        <a:rPr lang="en-US" sz="1100" dirty="0">
+                          <a:solidFill>
+                            <a:srgbClr val="0064D9"/>
+                          </a:solidFill>
+                          <a:latin typeface="Courier New" pitchFamily="34" charset="0"/>
+                          <a:ea typeface="Courier New" pitchFamily="34" charset="-122"/>
+                          <a:cs typeface="Courier New" pitchFamily="34" charset="-120"/>
+                        </a:rPr>
+                        <a:t>ZPC_BR_ADMIN</a:t>
+                      </a:r>
+                      <a:r>
+                        <a:rPr lang="en-US" sz="1100" dirty="0">
+                          <a:solidFill>
+                            <a:srgbClr val="1D2D3E"/>
+                          </a:solidFill>
+                        </a:rPr>
+                        <a:t> e </a:t>
+                      </a:r>
+                      <a:r>
+                        <a:rPr lang="en-US" sz="1100" dirty="0">
+                          <a:solidFill>
+                            <a:srgbClr val="0064D9"/>
+                          </a:solidFill>
+                          <a:latin typeface="Courier New" pitchFamily="34" charset="0"/>
+                          <a:ea typeface="Courier New" pitchFamily="34" charset="-122"/>
+                          <a:cs typeface="Courier New" pitchFamily="34" charset="-120"/>
+                        </a:rPr>
+                        <a:t>ZPC_BR_COMUM</a:t>
+                      </a:r>
+                      <a:r>
+                        <a:rPr lang="en-US" sz="1100" dirty="0">
+                          <a:solidFill>
+                            <a:srgbClr val="1D2D3E"/>
+                          </a:solidFill>
+                        </a:rPr>
                         <a:t>)</a:t>
                       </a:r>
                       <a:endParaRPr lang="en-US" sz="1200" dirty="0"/>
@@ -8317,7 +8412,7 @@
                   <a:srgbClr val="89D1FF"/>
                 </a:solidFill>
               </a:rPr>
-              <a:t>AULA 04.06 · SEÇÃO 2</a:t>
+              <a:t>AULA 02.06 · SEÇÃO 2</a:t>
             </a:r>
             <a:endParaRPr lang="en-US" sz="1300" dirty="0"/>
           </a:p>
@@ -8792,7 +8887,7 @@
                   <a:srgbClr val="1D2D3E"/>
                 </a:solidFill>
               </a:rPr>
-              <a:t>Só os aeroportos dos países autorizados</a:t>
+              <a:t>Só os clientes das UFs autorizadas</a:t>
             </a:r>
             <a:endParaRPr lang="en-US" sz="2800" dirty="0"/>
           </a:p>
@@ -8856,7 +8951,7 @@
         <p:spPr>
           <a:xfrm>
             <a:off x="640080" y="1700784"/>
-            <a:ext cx="1842516" cy="292608"/>
+            <a:ext cx="2075688" cy="292608"/>
           </a:xfrm>
           <a:prstGeom prst="rect">
             <a:avLst/>
@@ -8876,7 +8971,7 @@
         <p:spPr>
           <a:xfrm>
             <a:off x="640080" y="1700784"/>
-            <a:ext cx="1842516" cy="27432"/>
+            <a:ext cx="2075688" cy="27432"/>
           </a:xfrm>
           <a:prstGeom prst="rect">
             <a:avLst/>
@@ -8896,7 +8991,7 @@
         <p:spPr>
           <a:xfrm>
             <a:off x="731520" y="1719072"/>
-            <a:ext cx="1659636" cy="274320"/>
+            <a:ext cx="1892808" cy="274320"/>
           </a:xfrm>
           <a:prstGeom prst="rect">
             <a:avLst/>
@@ -8917,7 +9012,7 @@
                   <a:srgbClr val="FFFFFF"/>
                 </a:solidFill>
               </a:rPr>
-              <a:t>/dmo/i_airport.dcls</a:t>
+              <a:t>zc_pc_cliente_app.dcls</a:t>
             </a:r>
             <a:endParaRPr lang="en-US" sz="950" dirty="0"/>
           </a:p>
@@ -8953,7 +9048,7 @@
                   <a:srgbClr val="9DA5B4"/>
                 </a:solidFill>
               </a:rPr>
-              <a:t>/DMO/FLIGHT_REUSE › Access Controls (simplificada)</a:t>
+              <a:t>ZAVBS_PC_CLIENTES › Access Control (abap/README.md, seção 7.6)</a:t>
             </a:r>
             <a:endParaRPr lang="en-US" sz="850" dirty="0"/>
           </a:p>
@@ -9210,7 +9305,7 @@
                 <a:ea typeface="Courier New" pitchFamily="34" charset="-122"/>
                 <a:cs typeface="Courier New" pitchFamily="34" charset="-120"/>
               </a:rPr>
-              <a:t>'Access control for airports'</a:t>
+              <a:t>'Acesso aos clientes'</a:t>
             </a:r>
             <a:endParaRPr lang="en-US" sz="1050" dirty="0"/>
           </a:p>
@@ -9327,7 +9422,7 @@
                 <a:ea typeface="Courier New" pitchFamily="34" charset="-122"/>
                 <a:cs typeface="Courier New" pitchFamily="34" charset="-120"/>
               </a:rPr>
-              <a:t>/DMO/I_AIRPORT</a:t>
+              <a:t>ZC_PC_CLIENTE_APP</a:t>
             </a:r>
             <a:r>
               <a:rPr lang="en-US" sz="1050" dirty="0">
@@ -9446,7 +9541,7 @@
                 <a:ea typeface="Courier New" pitchFamily="34" charset="-122"/>
                 <a:cs typeface="Courier New" pitchFamily="34" charset="-120"/>
               </a:rPr>
-              <a:t>/DMO/I_Airport</a:t>
+              <a:t>ZC_PC_CLIENTE_APP</a:t>
             </a:r>
             <a:endParaRPr lang="en-US" sz="1050" dirty="0"/>
           </a:p>
@@ -9521,7 +9616,7 @@
                 <a:ea typeface="Courier New" pitchFamily="34" charset="-122"/>
                 <a:cs typeface="Courier New" pitchFamily="34" charset="-120"/>
               </a:rPr>
-              <a:t>CountryCode</a:t>
+              <a:t>UfPrincipal</a:t>
             </a:r>
             <a:r>
               <a:rPr lang="en-US" sz="1050" dirty="0">
@@ -9642,7 +9737,7 @@
                 <a:ea typeface="Courier New" pitchFamily="34" charset="-122"/>
                 <a:cs typeface="Courier New" pitchFamily="34" charset="-120"/>
               </a:rPr>
-              <a:t>/DMO/TRVL</a:t>
+              <a:t>ZPC_ADMIN</a:t>
             </a:r>
             <a:r>
               <a:rPr lang="en-US" sz="1050" dirty="0">
@@ -9684,7 +9779,7 @@
                 <a:ea typeface="Courier New" pitchFamily="34" charset="-122"/>
                 <a:cs typeface="Courier New" pitchFamily="34" charset="-120"/>
               </a:rPr>
-              <a:t>/DMO/CNTRY</a:t>
+              <a:t>ZPC_UF</a:t>
             </a:r>
             <a:r>
               <a:rPr lang="en-US" sz="1050" dirty="0">
@@ -9969,7 +10064,7 @@
                 <a:ea typeface="Courier New" pitchFamily="34" charset="-122"/>
                 <a:cs typeface="Courier New" pitchFamily="34" charset="-120"/>
               </a:rPr>
-              <a:t>CountryCode</a:t>
+              <a:t>UfPrincipal</a:t>
             </a:r>
             <a:r>
               <a:rPr lang="en-US" sz="1050" dirty="0">
@@ -9988,7 +10083,7 @@
                 <a:ea typeface="Courier New" pitchFamily="34" charset="-122"/>
                 <a:cs typeface="Courier New" pitchFamily="34" charset="-120"/>
               </a:rPr>
-              <a:t>/DMO/CNTRY</a:t>
+              <a:t>ZPC_UF</a:t>
             </a:r>
             <a:r>
               <a:rPr lang="en-US" sz="1050" dirty="0">
@@ -10571,7 +10666,7 @@
                   <a:srgbClr val="89D1FF"/>
                 </a:solidFill>
               </a:rPr>
-              <a:t>AULA 04.06 · SEÇÃO 3</a:t>
+              <a:t>AULA 02.06 · SEÇÃO 3</a:t>
             </a:r>
             <a:endParaRPr lang="en-US" sz="1300" dirty="0"/>
           </a:p>
@@ -11022,7 +11117,7 @@
                   <a:srgbClr val="0064D9"/>
                 </a:solidFill>
               </a:rPr>
-              <a:t>AUTHORITY-CHECK · EXERCÍCIO OFICIAL</a:t>
+              <a:t>AUTHORITY-CHECK · NO PROJETO</a:t>
             </a:r>
             <a:endParaRPr lang="en-US" sz="1100" dirty="0"/>
           </a:p>
@@ -11060,7 +11155,7 @@
                   <a:srgbClr val="1D2D3E"/>
                 </a:solidFill>
               </a:rPr>
-              <a:t>Distinguir "não existe" de "não autorizado"</a:t>
+              <a:t>Checar a atividade antes de cada operação</a:t>
             </a:r>
             <a:endParaRPr lang="en-US" sz="2800" dirty="0"/>
           </a:p>
@@ -11124,7 +11219,7 @@
         <p:spPr>
           <a:xfrm>
             <a:off x="640080" y="1700784"/>
-            <a:ext cx="3163824" cy="292608"/>
+            <a:ext cx="1997964" cy="292608"/>
           </a:xfrm>
           <a:prstGeom prst="rect">
             <a:avLst/>
@@ -11144,7 +11239,7 @@
         <p:spPr>
           <a:xfrm>
             <a:off x="640080" y="1700784"/>
-            <a:ext cx="3163824" cy="27432"/>
+            <a:ext cx="1997964" cy="27432"/>
           </a:xfrm>
           <a:prstGeom prst="rect">
             <a:avLst/>
@@ -11164,7 +11259,7 @@
         <p:spPr>
           <a:xfrm>
             <a:off x="731520" y="1719072"/>
-            <a:ext cx="2980944" cy="274320"/>
+            <a:ext cx="1815084" cy="274320"/>
           </a:xfrm>
           <a:prstGeom prst="rect">
             <a:avLst/>
@@ -11185,7 +11280,7 @@
                   <a:srgbClr val="FFFFFF"/>
                 </a:solidFill>
               </a:rPr>
-              <a:t>zcl_06_solution.clas.locals_imp.abap</a:t>
+              <a:t>zcl_pc_auth.clas.abap</a:t>
             </a:r>
             <a:endParaRPr lang="en-US" sz="950" dirty="0"/>
           </a:p>
@@ -11221,7 +11316,7 @@
                   <a:srgbClr val="9DA5B4"/>
                 </a:solidFill>
               </a:rPr>
-              <a:t>ZCL_06_SOLUTION › Local Types › lcl_carrier</a:t>
+              <a:t>ZCL_PC_AUTH e ZBP_R_PC_PEDIDO (trechos)</a:t>
             </a:r>
             <a:endParaRPr lang="en-US" sz="850" dirty="0"/>
           </a:p>
@@ -11667,7 +11762,7 @@
                 <a:ea typeface="Courier New" pitchFamily="34" charset="-122"/>
                 <a:cs typeface="Courier New" pitchFamily="34" charset="-120"/>
               </a:rPr>
-              <a:t>constructor</a:t>
+              <a:t>verificar_pedido</a:t>
             </a:r>
             <a:r>
               <a:rPr lang="en-US" sz="950" dirty="0">
@@ -11701,15 +11796,103 @@
               <a:t>  </a:t>
             </a:r>
             <a:r>
-              <a:rPr lang="en-US" sz="950" i="1" dirty="0">
-                <a:solidFill>
-                  <a:srgbClr val="6A9955"/>
-                </a:solidFill>
-                <a:latin typeface="Courier New" pitchFamily="34" charset="0"/>
-                <a:ea typeface="Courier New" pitchFamily="34" charset="-122"/>
-                <a:cs typeface="Courier New" pitchFamily="34" charset="-120"/>
-              </a:rPr>
-              <a:t>" Leitura pela view protegida: só volta o que o usuário pode ver</a:t>
+              <a:rPr lang="en-US" sz="950" dirty="0">
+                <a:solidFill>
+                  <a:srgbClr val="569CD6"/>
+                </a:solidFill>
+                <a:latin typeface="Courier New" pitchFamily="34" charset="0"/>
+                <a:ea typeface="Courier New" pitchFamily="34" charset="-122"/>
+                <a:cs typeface="Courier New" pitchFamily="34" charset="-120"/>
+              </a:rPr>
+              <a:t>IF</a:t>
+            </a:r>
+            <a:r>
+              <a:rPr lang="en-US" sz="950" dirty="0">
+                <a:solidFill>
+                  <a:srgbClr val="CCCCCC"/>
+                </a:solidFill>
+                <a:latin typeface="Courier New" pitchFamily="34" charset="0"/>
+                <a:ea typeface="Courier New" pitchFamily="34" charset="-122"/>
+                <a:cs typeface="Courier New" pitchFamily="34" charset="-120"/>
+              </a:rPr>
+              <a:t> </a:t>
+            </a:r>
+            <a:r>
+              <a:rPr lang="en-US" sz="950" dirty="0">
+                <a:solidFill>
+                  <a:srgbClr val="4EC9B0"/>
+                </a:solidFill>
+                <a:latin typeface="Courier New" pitchFamily="34" charset="0"/>
+                <a:ea typeface="Courier New" pitchFamily="34" charset="-122"/>
+                <a:cs typeface="Courier New" pitchFamily="34" charset="-120"/>
+              </a:rPr>
+              <a:t>zif_pc_constants=&gt;</a:t>
+            </a:r>
+            <a:r>
+              <a:rPr lang="en-US" sz="950" dirty="0">
+                <a:solidFill>
+                  <a:srgbClr val="CCCCCC"/>
+                </a:solidFill>
+                <a:latin typeface="Courier New" pitchFamily="34" charset="0"/>
+                <a:ea typeface="Courier New" pitchFamily="34" charset="-122"/>
+                <a:cs typeface="Courier New" pitchFamily="34" charset="-120"/>
+              </a:rPr>
+              <a:t>c_modo_trial</a:t>
+            </a:r>
+            <a:r>
+              <a:rPr lang="en-US" sz="950" dirty="0">
+                <a:solidFill>
+                  <a:srgbClr val="CCCCCC"/>
+                </a:solidFill>
+                <a:latin typeface="Courier New" pitchFamily="34" charset="0"/>
+                <a:ea typeface="Courier New" pitchFamily="34" charset="-122"/>
+                <a:cs typeface="Courier New" pitchFamily="34" charset="-120"/>
+              </a:rPr>
+              <a:t> </a:t>
+            </a:r>
+            <a:r>
+              <a:rPr lang="en-US" sz="950" dirty="0">
+                <a:solidFill>
+                  <a:srgbClr val="CCCCCC"/>
+                </a:solidFill>
+                <a:latin typeface="Courier New" pitchFamily="34" charset="0"/>
+                <a:ea typeface="Courier New" pitchFamily="34" charset="-122"/>
+                <a:cs typeface="Courier New" pitchFamily="34" charset="-120"/>
+              </a:rPr>
+              <a:t>=</a:t>
+            </a:r>
+            <a:r>
+              <a:rPr lang="en-US" sz="950" dirty="0">
+                <a:solidFill>
+                  <a:srgbClr val="CCCCCC"/>
+                </a:solidFill>
+                <a:latin typeface="Courier New" pitchFamily="34" charset="0"/>
+                <a:ea typeface="Courier New" pitchFamily="34" charset="-122"/>
+                <a:cs typeface="Courier New" pitchFamily="34" charset="-120"/>
+              </a:rPr>
+              <a:t> </a:t>
+            </a:r>
+            <a:r>
+              <a:rPr lang="en-US" sz="950" dirty="0">
+                <a:solidFill>
+                  <a:srgbClr val="CCCCCC"/>
+                </a:solidFill>
+                <a:latin typeface="Courier New" pitchFamily="34" charset="0"/>
+                <a:ea typeface="Courier New" pitchFamily="34" charset="-122"/>
+                <a:cs typeface="Courier New" pitchFamily="34" charset="-120"/>
+              </a:rPr>
+              <a:t>abap_true</a:t>
+            </a:r>
+            <a:r>
+              <a:rPr lang="en-US" sz="950" dirty="0">
+                <a:solidFill>
+                  <a:srgbClr val="CCCCCC"/>
+                </a:solidFill>
+                <a:latin typeface="Courier New" pitchFamily="34" charset="0"/>
+                <a:ea typeface="Courier New" pitchFamily="34" charset="-122"/>
+                <a:cs typeface="Courier New" pitchFamily="34" charset="-120"/>
+              </a:rPr>
+              <a:t>.</a:t>
             </a:r>
             <a:endParaRPr lang="en-US" sz="950" dirty="0"/>
           </a:p>
@@ -11729,18 +11912,18 @@
                 <a:ea typeface="Courier New" pitchFamily="34" charset="-122"/>
                 <a:cs typeface="Courier New" pitchFamily="34" charset="-120"/>
               </a:rPr>
-              <a:t>  </a:t>
+              <a:t>    </a:t>
             </a:r>
             <a:r>
               <a:rPr lang="en-US" sz="950" dirty="0">
                 <a:solidFill>
-                  <a:srgbClr val="569CD6"/>
-                </a:solidFill>
-                <a:latin typeface="Courier New" pitchFamily="34" charset="0"/>
-                <a:ea typeface="Courier New" pitchFamily="34" charset="-122"/>
-                <a:cs typeface="Courier New" pitchFamily="34" charset="-120"/>
-              </a:rPr>
-              <a:t>SELECT</a:t>
+                  <a:srgbClr val="CCCCCC"/>
+                </a:solidFill>
+                <a:latin typeface="Courier New" pitchFamily="34" charset="0"/>
+                <a:ea typeface="Courier New" pitchFamily="34" charset="-122"/>
+                <a:cs typeface="Courier New" pitchFamily="34" charset="-120"/>
+              </a:rPr>
+              <a:t>rv_autorizado</a:t>
             </a:r>
             <a:r>
               <a:rPr lang="en-US" sz="950" dirty="0">
@@ -11756,13 +11939,13 @@
             <a:r>
               <a:rPr lang="en-US" sz="950" dirty="0">
                 <a:solidFill>
-                  <a:srgbClr val="569CD6"/>
-                </a:solidFill>
-                <a:latin typeface="Courier New" pitchFamily="34" charset="0"/>
-                <a:ea typeface="Courier New" pitchFamily="34" charset="-122"/>
-                <a:cs typeface="Courier New" pitchFamily="34" charset="-120"/>
-              </a:rPr>
-              <a:t>SINGLE</a:t>
+                  <a:srgbClr val="CCCCCC"/>
+                </a:solidFill>
+                <a:latin typeface="Courier New" pitchFamily="34" charset="0"/>
+                <a:ea typeface="Courier New" pitchFamily="34" charset="-122"/>
+                <a:cs typeface="Courier New" pitchFamily="34" charset="-120"/>
+              </a:rPr>
+              <a:t>=</a:t>
             </a:r>
             <a:r>
               <a:rPr lang="en-US" sz="950" dirty="0">
@@ -11778,13 +11961,13 @@
             <a:r>
               <a:rPr lang="en-US" sz="950" dirty="0">
                 <a:solidFill>
-                  <a:srgbClr val="569CD6"/>
-                </a:solidFill>
-                <a:latin typeface="Courier New" pitchFamily="34" charset="0"/>
-                <a:ea typeface="Courier New" pitchFamily="34" charset="-122"/>
-                <a:cs typeface="Courier New" pitchFamily="34" charset="-120"/>
-              </a:rPr>
-              <a:t>FROM</a:t>
+                  <a:srgbClr val="CCCCCC"/>
+                </a:solidFill>
+                <a:latin typeface="Courier New" pitchFamily="34" charset="0"/>
+                <a:ea typeface="Courier New" pitchFamily="34" charset="-122"/>
+                <a:cs typeface="Courier New" pitchFamily="34" charset="-120"/>
+              </a:rPr>
+              <a:t>abap_true</a:t>
             </a:r>
             <a:r>
               <a:rPr lang="en-US" sz="950" dirty="0">
@@ -11795,18 +11978,29 @@
                 <a:ea typeface="Courier New" pitchFamily="34" charset="-122"/>
                 <a:cs typeface="Courier New" pitchFamily="34" charset="-120"/>
               </a:rPr>
-              <a:t> </a:t>
+              <a:t>.</a:t>
             </a:r>
             <a:r>
               <a:rPr lang="en-US" sz="950" dirty="0">
                 <a:solidFill>
-                  <a:srgbClr val="4EC9B0"/>
-                </a:solidFill>
-                <a:latin typeface="Courier New" pitchFamily="34" charset="0"/>
-                <a:ea typeface="Courier New" pitchFamily="34" charset="-122"/>
-                <a:cs typeface="Courier New" pitchFamily="34" charset="-120"/>
-              </a:rPr>
-              <a:t>/lrn/i_carrier</a:t>
+                  <a:srgbClr val="CCCCCC"/>
+                </a:solidFill>
+                <a:latin typeface="Courier New" pitchFamily="34" charset="0"/>
+                <a:ea typeface="Courier New" pitchFamily="34" charset="-122"/>
+                <a:cs typeface="Courier New" pitchFamily="34" charset="-120"/>
+              </a:rPr>
+              <a:t>        </a:t>
+            </a:r>
+            <a:r>
+              <a:rPr lang="en-US" sz="950" i="1" dirty="0">
+                <a:solidFill>
+                  <a:srgbClr val="6A9955"/>
+                </a:solidFill>
+                <a:latin typeface="Courier New" pitchFamily="34" charset="0"/>
+                <a:ea typeface="Courier New" pitchFamily="34" charset="-122"/>
+                <a:cs typeface="Courier New" pitchFamily="34" charset="-120"/>
+              </a:rPr>
+              <a:t>" trial: sem business roles</a:t>
             </a:r>
             <a:endParaRPr lang="en-US" sz="950" dirty="0"/>
           </a:p>
@@ -11837,7 +12031,7 @@
                 <a:ea typeface="Courier New" pitchFamily="34" charset="-122"/>
                 <a:cs typeface="Courier New" pitchFamily="34" charset="-120"/>
               </a:rPr>
-              <a:t>FIELDS</a:t>
+              <a:t>RETURN</a:t>
             </a:r>
             <a:r>
               <a:rPr lang="en-US" sz="950" dirty="0">
@@ -11848,172 +12042,7 @@
                 <a:ea typeface="Courier New" pitchFamily="34" charset="-122"/>
                 <a:cs typeface="Courier New" pitchFamily="34" charset="-120"/>
               </a:rPr>
-              <a:t> </a:t>
-            </a:r>
-            <a:r>
-              <a:rPr lang="en-US" sz="950" dirty="0">
-                <a:solidFill>
-                  <a:srgbClr val="CCCCCC"/>
-                </a:solidFill>
-                <a:latin typeface="Courier New" pitchFamily="34" charset="0"/>
-                <a:ea typeface="Courier New" pitchFamily="34" charset="-122"/>
-                <a:cs typeface="Courier New" pitchFamily="34" charset="-120"/>
-              </a:rPr>
-              <a:t>concat_with_space</a:t>
-            </a:r>
-            <a:r>
-              <a:rPr lang="en-US" sz="950" dirty="0">
-                <a:solidFill>
-                  <a:srgbClr val="CCCCCC"/>
-                </a:solidFill>
-                <a:latin typeface="Courier New" pitchFamily="34" charset="0"/>
-                <a:ea typeface="Courier New" pitchFamily="34" charset="-122"/>
-                <a:cs typeface="Courier New" pitchFamily="34" charset="-120"/>
-              </a:rPr>
-              <a:t>(</a:t>
-            </a:r>
-            <a:r>
-              <a:rPr lang="en-US" sz="950" dirty="0">
-                <a:solidFill>
-                  <a:srgbClr val="CCCCCC"/>
-                </a:solidFill>
-                <a:latin typeface="Courier New" pitchFamily="34" charset="0"/>
-                <a:ea typeface="Courier New" pitchFamily="34" charset="-122"/>
-                <a:cs typeface="Courier New" pitchFamily="34" charset="-120"/>
-              </a:rPr>
-              <a:t> </a:t>
-            </a:r>
-            <a:r>
-              <a:rPr lang="en-US" sz="950" dirty="0">
-                <a:solidFill>
-                  <a:srgbClr val="CCCCCC"/>
-                </a:solidFill>
-                <a:latin typeface="Courier New" pitchFamily="34" charset="0"/>
-                <a:ea typeface="Courier New" pitchFamily="34" charset="-122"/>
-                <a:cs typeface="Courier New" pitchFamily="34" charset="-120"/>
-              </a:rPr>
-              <a:t>AirlineID</a:t>
-            </a:r>
-            <a:r>
-              <a:rPr lang="en-US" sz="950" dirty="0">
-                <a:solidFill>
-                  <a:srgbClr val="CCCCCC"/>
-                </a:solidFill>
-                <a:latin typeface="Courier New" pitchFamily="34" charset="0"/>
-                <a:ea typeface="Courier New" pitchFamily="34" charset="-122"/>
-                <a:cs typeface="Courier New" pitchFamily="34" charset="-120"/>
-              </a:rPr>
-              <a:t>,</a:t>
-            </a:r>
-            <a:r>
-              <a:rPr lang="en-US" sz="950" dirty="0">
-                <a:solidFill>
-                  <a:srgbClr val="CCCCCC"/>
-                </a:solidFill>
-                <a:latin typeface="Courier New" pitchFamily="34" charset="0"/>
-                <a:ea typeface="Courier New" pitchFamily="34" charset="-122"/>
-                <a:cs typeface="Courier New" pitchFamily="34" charset="-120"/>
-              </a:rPr>
-              <a:t> </a:t>
-            </a:r>
-            <a:r>
-              <a:rPr lang="en-US" sz="950" dirty="0">
-                <a:solidFill>
-                  <a:srgbClr val="CCCCCC"/>
-                </a:solidFill>
-                <a:latin typeface="Courier New" pitchFamily="34" charset="0"/>
-                <a:ea typeface="Courier New" pitchFamily="34" charset="-122"/>
-                <a:cs typeface="Courier New" pitchFamily="34" charset="-120"/>
-              </a:rPr>
-              <a:t>Name</a:t>
-            </a:r>
-            <a:r>
-              <a:rPr lang="en-US" sz="950" dirty="0">
-                <a:solidFill>
-                  <a:srgbClr val="CCCCCC"/>
-                </a:solidFill>
-                <a:latin typeface="Courier New" pitchFamily="34" charset="0"/>
-                <a:ea typeface="Courier New" pitchFamily="34" charset="-122"/>
-                <a:cs typeface="Courier New" pitchFamily="34" charset="-120"/>
-              </a:rPr>
-              <a:t>,</a:t>
-            </a:r>
-            <a:r>
-              <a:rPr lang="en-US" sz="950" dirty="0">
-                <a:solidFill>
-                  <a:srgbClr val="CCCCCC"/>
-                </a:solidFill>
-                <a:latin typeface="Courier New" pitchFamily="34" charset="0"/>
-                <a:ea typeface="Courier New" pitchFamily="34" charset="-122"/>
-                <a:cs typeface="Courier New" pitchFamily="34" charset="-120"/>
-              </a:rPr>
-              <a:t> </a:t>
-            </a:r>
-            <a:r>
-              <a:rPr lang="en-US" sz="950" dirty="0">
-                <a:solidFill>
-                  <a:srgbClr val="B5CEA8"/>
-                </a:solidFill>
-                <a:latin typeface="Courier New" pitchFamily="34" charset="0"/>
-                <a:ea typeface="Courier New" pitchFamily="34" charset="-122"/>
-                <a:cs typeface="Courier New" pitchFamily="34" charset="-120"/>
-              </a:rPr>
-              <a:t>1</a:t>
-            </a:r>
-            <a:r>
-              <a:rPr lang="en-US" sz="950" dirty="0">
-                <a:solidFill>
-                  <a:srgbClr val="CCCCCC"/>
-                </a:solidFill>
-                <a:latin typeface="Courier New" pitchFamily="34" charset="0"/>
-                <a:ea typeface="Courier New" pitchFamily="34" charset="-122"/>
-                <a:cs typeface="Courier New" pitchFamily="34" charset="-120"/>
-              </a:rPr>
-              <a:t> </a:t>
-            </a:r>
-            <a:r>
-              <a:rPr lang="en-US" sz="950" dirty="0">
-                <a:solidFill>
-                  <a:srgbClr val="CCCCCC"/>
-                </a:solidFill>
-                <a:latin typeface="Courier New" pitchFamily="34" charset="0"/>
-                <a:ea typeface="Courier New" pitchFamily="34" charset="-122"/>
-                <a:cs typeface="Courier New" pitchFamily="34" charset="-120"/>
-              </a:rPr>
-              <a:t>)</a:t>
-            </a:r>
-            <a:r>
-              <a:rPr lang="en-US" sz="950" dirty="0">
-                <a:solidFill>
-                  <a:srgbClr val="CCCCCC"/>
-                </a:solidFill>
-                <a:latin typeface="Courier New" pitchFamily="34" charset="0"/>
-                <a:ea typeface="Courier New" pitchFamily="34" charset="-122"/>
-                <a:cs typeface="Courier New" pitchFamily="34" charset="-120"/>
-              </a:rPr>
-              <a:t>,</a:t>
-            </a:r>
-            <a:r>
-              <a:rPr lang="en-US" sz="950" dirty="0">
-                <a:solidFill>
-                  <a:srgbClr val="CCCCCC"/>
-                </a:solidFill>
-                <a:latin typeface="Courier New" pitchFamily="34" charset="0"/>
-                <a:ea typeface="Courier New" pitchFamily="34" charset="-122"/>
-                <a:cs typeface="Courier New" pitchFamily="34" charset="-120"/>
-              </a:rPr>
-              <a:t> </a:t>
-            </a:r>
-            <a:r>
-              <a:rPr lang="en-US" sz="950" dirty="0">
-                <a:solidFill>
-                  <a:srgbClr val="CCCCCC"/>
-                </a:solidFill>
-                <a:latin typeface="Courier New" pitchFamily="34" charset="0"/>
-                <a:ea typeface="Courier New" pitchFamily="34" charset="-122"/>
-                <a:cs typeface="Courier New" pitchFamily="34" charset="-120"/>
-              </a:rPr>
-              <a:t>CurrencyCode</a:t>
+              <a:t>.</a:t>
             </a:r>
             <a:endParaRPr lang="en-US" sz="950" dirty="0"/>
           </a:p>
@@ -12033,7 +12062,7 @@
                 <a:ea typeface="Courier New" pitchFamily="34" charset="-122"/>
                 <a:cs typeface="Courier New" pitchFamily="34" charset="-120"/>
               </a:rPr>
-              <a:t>    </a:t>
+              <a:t>  </a:t>
             </a:r>
             <a:r>
               <a:rPr lang="en-US" sz="950" dirty="0">
@@ -12044,7 +12073,7 @@
                 <a:ea typeface="Courier New" pitchFamily="34" charset="-122"/>
                 <a:cs typeface="Courier New" pitchFamily="34" charset="-120"/>
               </a:rPr>
-              <a:t>WHERE</a:t>
+              <a:t>ENDIF</a:t>
             </a:r>
             <a:r>
               <a:rPr lang="en-US" sz="950" dirty="0">
@@ -12055,73 +12084,7 @@
                 <a:ea typeface="Courier New" pitchFamily="34" charset="-122"/>
                 <a:cs typeface="Courier New" pitchFamily="34" charset="-120"/>
               </a:rPr>
-              <a:t> </a:t>
-            </a:r>
-            <a:r>
-              <a:rPr lang="en-US" sz="950" dirty="0">
-                <a:solidFill>
-                  <a:srgbClr val="CCCCCC"/>
-                </a:solidFill>
-                <a:latin typeface="Courier New" pitchFamily="34" charset="0"/>
-                <a:ea typeface="Courier New" pitchFamily="34" charset="-122"/>
-                <a:cs typeface="Courier New" pitchFamily="34" charset="-120"/>
-              </a:rPr>
-              <a:t>AirlineID</a:t>
-            </a:r>
-            <a:r>
-              <a:rPr lang="en-US" sz="950" dirty="0">
-                <a:solidFill>
-                  <a:srgbClr val="CCCCCC"/>
-                </a:solidFill>
-                <a:latin typeface="Courier New" pitchFamily="34" charset="0"/>
-                <a:ea typeface="Courier New" pitchFamily="34" charset="-122"/>
-                <a:cs typeface="Courier New" pitchFamily="34" charset="-120"/>
-              </a:rPr>
-              <a:t> </a:t>
-            </a:r>
-            <a:r>
-              <a:rPr lang="en-US" sz="950" dirty="0">
-                <a:solidFill>
-                  <a:srgbClr val="CCCCCC"/>
-                </a:solidFill>
-                <a:latin typeface="Courier New" pitchFamily="34" charset="0"/>
-                <a:ea typeface="Courier New" pitchFamily="34" charset="-122"/>
-                <a:cs typeface="Courier New" pitchFamily="34" charset="-120"/>
-              </a:rPr>
-              <a:t>=</a:t>
-            </a:r>
-            <a:r>
-              <a:rPr lang="en-US" sz="950" dirty="0">
-                <a:solidFill>
-                  <a:srgbClr val="CCCCCC"/>
-                </a:solidFill>
-                <a:latin typeface="Courier New" pitchFamily="34" charset="0"/>
-                <a:ea typeface="Courier New" pitchFamily="34" charset="-122"/>
-                <a:cs typeface="Courier New" pitchFamily="34" charset="-120"/>
-              </a:rPr>
-              <a:t> </a:t>
-            </a:r>
-            <a:r>
-              <a:rPr lang="en-US" sz="950" dirty="0">
-                <a:solidFill>
-                  <a:srgbClr val="CCCCCC"/>
-                </a:solidFill>
-                <a:latin typeface="Courier New" pitchFamily="34" charset="0"/>
-                <a:ea typeface="Courier New" pitchFamily="34" charset="-122"/>
-                <a:cs typeface="Courier New" pitchFamily="34" charset="-120"/>
-              </a:rPr>
-              <a:t>@</a:t>
-            </a:r>
-            <a:r>
-              <a:rPr lang="en-US" sz="950" dirty="0">
-                <a:solidFill>
-                  <a:srgbClr val="CCCCCC"/>
-                </a:solidFill>
-                <a:latin typeface="Courier New" pitchFamily="34" charset="0"/>
-                <a:ea typeface="Courier New" pitchFamily="34" charset="-122"/>
-                <a:cs typeface="Courier New" pitchFamily="34" charset="-120"/>
-              </a:rPr>
-              <a:t>i_carrier_id</a:t>
+              <a:t>.</a:t>
             </a:r>
             <a:endParaRPr lang="en-US" sz="950" dirty="0"/>
           </a:p>
@@ -12135,200 +12098,13 @@
             <a:r>
               <a:rPr lang="en-US" sz="950" dirty="0">
                 <a:solidFill>
-                  <a:srgbClr val="CCCCCC"/>
-                </a:solidFill>
-                <a:latin typeface="Courier New" pitchFamily="34" charset="0"/>
-                <a:ea typeface="Courier New" pitchFamily="34" charset="-122"/>
-                <a:cs typeface="Courier New" pitchFamily="34" charset="-120"/>
-              </a:rPr>
-              <a:t>    </a:t>
-            </a:r>
-            <a:r>
-              <a:rPr lang="en-US" sz="950" dirty="0">
-                <a:solidFill>
-                  <a:srgbClr val="569CD6"/>
-                </a:solidFill>
-                <a:latin typeface="Courier New" pitchFamily="34" charset="0"/>
-                <a:ea typeface="Courier New" pitchFamily="34" charset="-122"/>
-                <a:cs typeface="Courier New" pitchFamily="34" charset="-120"/>
-              </a:rPr>
-              <a:t>INTO</a:t>
-            </a:r>
-            <a:r>
-              <a:rPr lang="en-US" sz="950" dirty="0">
-                <a:solidFill>
-                  <a:srgbClr val="CCCCCC"/>
+                  <a:srgbClr val="000000"/>
                 </a:solidFill>
                 <a:latin typeface="Courier New" pitchFamily="34" charset="0"/>
                 <a:ea typeface="Courier New" pitchFamily="34" charset="-122"/>
                 <a:cs typeface="Courier New" pitchFamily="34" charset="-120"/>
               </a:rPr>
               <a:t> </a:t>
-            </a:r>
-            <a:r>
-              <a:rPr lang="en-US" sz="950" dirty="0">
-                <a:solidFill>
-                  <a:srgbClr val="CCCCCC"/>
-                </a:solidFill>
-                <a:latin typeface="Courier New" pitchFamily="34" charset="0"/>
-                <a:ea typeface="Courier New" pitchFamily="34" charset="-122"/>
-                <a:cs typeface="Courier New" pitchFamily="34" charset="-120"/>
-              </a:rPr>
-              <a:t>(</a:t>
-            </a:r>
-            <a:r>
-              <a:rPr lang="en-US" sz="950" dirty="0">
-                <a:solidFill>
-                  <a:srgbClr val="CCCCCC"/>
-                </a:solidFill>
-                <a:latin typeface="Courier New" pitchFamily="34" charset="0"/>
-                <a:ea typeface="Courier New" pitchFamily="34" charset="-122"/>
-                <a:cs typeface="Courier New" pitchFamily="34" charset="-120"/>
-              </a:rPr>
-              <a:t> </a:t>
-            </a:r>
-            <a:r>
-              <a:rPr lang="en-US" sz="950" dirty="0">
-                <a:solidFill>
-                  <a:srgbClr val="CCCCCC"/>
-                </a:solidFill>
-                <a:latin typeface="Courier New" pitchFamily="34" charset="0"/>
-                <a:ea typeface="Courier New" pitchFamily="34" charset="-122"/>
-                <a:cs typeface="Courier New" pitchFamily="34" charset="-120"/>
-              </a:rPr>
-              <a:t>@</a:t>
-            </a:r>
-            <a:r>
-              <a:rPr lang="en-US" sz="950" dirty="0">
-                <a:solidFill>
-                  <a:srgbClr val="CCCCCC"/>
-                </a:solidFill>
-                <a:latin typeface="Courier New" pitchFamily="34" charset="0"/>
-                <a:ea typeface="Courier New" pitchFamily="34" charset="-122"/>
-                <a:cs typeface="Courier New" pitchFamily="34" charset="-120"/>
-              </a:rPr>
-              <a:t>me-</a:t>
-            </a:r>
-            <a:r>
-              <a:rPr lang="en-US" sz="950" dirty="0">
-                <a:solidFill>
-                  <a:srgbClr val="CCCCCC"/>
-                </a:solidFill>
-                <a:latin typeface="Courier New" pitchFamily="34" charset="0"/>
-                <a:ea typeface="Courier New" pitchFamily="34" charset="-122"/>
-                <a:cs typeface="Courier New" pitchFamily="34" charset="-120"/>
-              </a:rPr>
-              <a:t>&gt;</a:t>
-            </a:r>
-            <a:r>
-              <a:rPr lang="en-US" sz="950" dirty="0">
-                <a:solidFill>
-                  <a:srgbClr val="CCCCCC"/>
-                </a:solidFill>
-                <a:latin typeface="Courier New" pitchFamily="34" charset="0"/>
-                <a:ea typeface="Courier New" pitchFamily="34" charset="-122"/>
-                <a:cs typeface="Courier New" pitchFamily="34" charset="-120"/>
-              </a:rPr>
-              <a:t>name</a:t>
-            </a:r>
-            <a:r>
-              <a:rPr lang="en-US" sz="950" dirty="0">
-                <a:solidFill>
-                  <a:srgbClr val="CCCCCC"/>
-                </a:solidFill>
-                <a:latin typeface="Courier New" pitchFamily="34" charset="0"/>
-                <a:ea typeface="Courier New" pitchFamily="34" charset="-122"/>
-                <a:cs typeface="Courier New" pitchFamily="34" charset="-120"/>
-              </a:rPr>
-              <a:t>,</a:t>
-            </a:r>
-            <a:r>
-              <a:rPr lang="en-US" sz="950" dirty="0">
-                <a:solidFill>
-                  <a:srgbClr val="CCCCCC"/>
-                </a:solidFill>
-                <a:latin typeface="Courier New" pitchFamily="34" charset="0"/>
-                <a:ea typeface="Courier New" pitchFamily="34" charset="-122"/>
-                <a:cs typeface="Courier New" pitchFamily="34" charset="-120"/>
-              </a:rPr>
-              <a:t> </a:t>
-            </a:r>
-            <a:r>
-              <a:rPr lang="en-US" sz="950" dirty="0">
-                <a:solidFill>
-                  <a:srgbClr val="CCCCCC"/>
-                </a:solidFill>
-                <a:latin typeface="Courier New" pitchFamily="34" charset="0"/>
-                <a:ea typeface="Courier New" pitchFamily="34" charset="-122"/>
-                <a:cs typeface="Courier New" pitchFamily="34" charset="-120"/>
-              </a:rPr>
-              <a:t>@</a:t>
-            </a:r>
-            <a:r>
-              <a:rPr lang="en-US" sz="950" dirty="0">
-                <a:solidFill>
-                  <a:srgbClr val="CCCCCC"/>
-                </a:solidFill>
-                <a:latin typeface="Courier New" pitchFamily="34" charset="0"/>
-                <a:ea typeface="Courier New" pitchFamily="34" charset="-122"/>
-                <a:cs typeface="Courier New" pitchFamily="34" charset="-120"/>
-              </a:rPr>
-              <a:t>me-</a:t>
-            </a:r>
-            <a:r>
-              <a:rPr lang="en-US" sz="950" dirty="0">
-                <a:solidFill>
-                  <a:srgbClr val="CCCCCC"/>
-                </a:solidFill>
-                <a:latin typeface="Courier New" pitchFamily="34" charset="0"/>
-                <a:ea typeface="Courier New" pitchFamily="34" charset="-122"/>
-                <a:cs typeface="Courier New" pitchFamily="34" charset="-120"/>
-              </a:rPr>
-              <a:t>&gt;</a:t>
-            </a:r>
-            <a:r>
-              <a:rPr lang="en-US" sz="950" dirty="0">
-                <a:solidFill>
-                  <a:srgbClr val="CCCCCC"/>
-                </a:solidFill>
-                <a:latin typeface="Courier New" pitchFamily="34" charset="0"/>
-                <a:ea typeface="Courier New" pitchFamily="34" charset="-122"/>
-                <a:cs typeface="Courier New" pitchFamily="34" charset="-120"/>
-              </a:rPr>
-              <a:t>currency_code</a:t>
-            </a:r>
-            <a:r>
-              <a:rPr lang="en-US" sz="950" dirty="0">
-                <a:solidFill>
-                  <a:srgbClr val="CCCCCC"/>
-                </a:solidFill>
-                <a:latin typeface="Courier New" pitchFamily="34" charset="0"/>
-                <a:ea typeface="Courier New" pitchFamily="34" charset="-122"/>
-                <a:cs typeface="Courier New" pitchFamily="34" charset="-120"/>
-              </a:rPr>
-              <a:t> </a:t>
-            </a:r>
-            <a:r>
-              <a:rPr lang="en-US" sz="950" dirty="0">
-                <a:solidFill>
-                  <a:srgbClr val="CCCCCC"/>
-                </a:solidFill>
-                <a:latin typeface="Courier New" pitchFamily="34" charset="0"/>
-                <a:ea typeface="Courier New" pitchFamily="34" charset="-122"/>
-                <a:cs typeface="Courier New" pitchFamily="34" charset="-120"/>
-              </a:rPr>
-              <a:t>)</a:t>
-            </a:r>
-            <a:r>
-              <a:rPr lang="en-US" sz="950" dirty="0">
-                <a:solidFill>
-                  <a:srgbClr val="CCCCCC"/>
-                </a:solidFill>
-                <a:latin typeface="Courier New" pitchFamily="34" charset="0"/>
-                <a:ea typeface="Courier New" pitchFamily="34" charset="-122"/>
-                <a:cs typeface="Courier New" pitchFamily="34" charset="-120"/>
-              </a:rPr>
-              <a:t>.</a:t>
             </a:r>
             <a:endParaRPr lang="en-US" sz="950" dirty="0"/>
           </a:p>
@@ -12342,13 +12118,68 @@
             <a:r>
               <a:rPr lang="en-US" sz="950" dirty="0">
                 <a:solidFill>
-                  <a:srgbClr val="000000"/>
+                  <a:srgbClr val="CCCCCC"/>
+                </a:solidFill>
+                <a:latin typeface="Courier New" pitchFamily="34" charset="0"/>
+                <a:ea typeface="Courier New" pitchFamily="34" charset="-122"/>
+                <a:cs typeface="Courier New" pitchFamily="34" charset="-120"/>
+              </a:rPr>
+              <a:t>  </a:t>
+            </a:r>
+            <a:r>
+              <a:rPr lang="en-US" sz="950" dirty="0">
+                <a:solidFill>
+                  <a:srgbClr val="569CD6"/>
+                </a:solidFill>
+                <a:latin typeface="Courier New" pitchFamily="34" charset="0"/>
+                <a:ea typeface="Courier New" pitchFamily="34" charset="-122"/>
+                <a:cs typeface="Courier New" pitchFamily="34" charset="-120"/>
+              </a:rPr>
+              <a:t>AUTHORITY-CHECK</a:t>
+            </a:r>
+            <a:r>
+              <a:rPr lang="en-US" sz="950" dirty="0">
+                <a:solidFill>
+                  <a:srgbClr val="CCCCCC"/>
                 </a:solidFill>
                 <a:latin typeface="Courier New" pitchFamily="34" charset="0"/>
                 <a:ea typeface="Courier New" pitchFamily="34" charset="-122"/>
                 <a:cs typeface="Courier New" pitchFamily="34" charset="-120"/>
               </a:rPr>
               <a:t> </a:t>
+            </a:r>
+            <a:r>
+              <a:rPr lang="en-US" sz="950" dirty="0">
+                <a:solidFill>
+                  <a:srgbClr val="569CD6"/>
+                </a:solidFill>
+                <a:latin typeface="Courier New" pitchFamily="34" charset="0"/>
+                <a:ea typeface="Courier New" pitchFamily="34" charset="-122"/>
+                <a:cs typeface="Courier New" pitchFamily="34" charset="-120"/>
+              </a:rPr>
+              <a:t>OBJECT</a:t>
+            </a:r>
+            <a:r>
+              <a:rPr lang="en-US" sz="950" dirty="0">
+                <a:solidFill>
+                  <a:srgbClr val="CCCCCC"/>
+                </a:solidFill>
+                <a:latin typeface="Courier New" pitchFamily="34" charset="0"/>
+                <a:ea typeface="Courier New" pitchFamily="34" charset="-122"/>
+                <a:cs typeface="Courier New" pitchFamily="34" charset="-120"/>
+              </a:rPr>
+              <a:t> </a:t>
+            </a:r>
+            <a:r>
+              <a:rPr lang="en-US" sz="950" dirty="0">
+                <a:solidFill>
+                  <a:srgbClr val="CE9178"/>
+                </a:solidFill>
+                <a:latin typeface="Courier New" pitchFamily="34" charset="0"/>
+                <a:ea typeface="Courier New" pitchFamily="34" charset="-122"/>
+                <a:cs typeface="Courier New" pitchFamily="34" charset="-120"/>
+              </a:rPr>
+              <a:t>'ZPC_PEDIDO'</a:t>
             </a:r>
             <a:endParaRPr lang="en-US" sz="950" dirty="0"/>
           </a:p>
@@ -12368,7 +12199,7 @@
                 <a:ea typeface="Courier New" pitchFamily="34" charset="-122"/>
                 <a:cs typeface="Courier New" pitchFamily="34" charset="-120"/>
               </a:rPr>
-              <a:t>  </a:t>
+              <a:t>    </a:t>
             </a:r>
             <a:r>
               <a:rPr lang="en-US" sz="950" dirty="0">
@@ -12379,7 +12210,7 @@
                 <a:ea typeface="Courier New" pitchFamily="34" charset="-122"/>
                 <a:cs typeface="Courier New" pitchFamily="34" charset="-120"/>
               </a:rPr>
-              <a:t>IF</a:t>
+              <a:t>ID</a:t>
             </a:r>
             <a:r>
               <a:rPr lang="en-US" sz="950" dirty="0">
@@ -12395,17 +12226,39 @@
             <a:r>
               <a:rPr lang="en-US" sz="950" dirty="0">
                 <a:solidFill>
+                  <a:srgbClr val="CE9178"/>
+                </a:solidFill>
+                <a:latin typeface="Courier New" pitchFamily="34" charset="0"/>
+                <a:ea typeface="Courier New" pitchFamily="34" charset="-122"/>
+                <a:cs typeface="Courier New" pitchFamily="34" charset="-120"/>
+              </a:rPr>
+              <a:t>'ACTVT'</a:t>
+            </a:r>
+            <a:r>
+              <a:rPr lang="en-US" sz="950" dirty="0">
+                <a:solidFill>
                   <a:srgbClr val="CCCCCC"/>
                 </a:solidFill>
                 <a:latin typeface="Courier New" pitchFamily="34" charset="0"/>
                 <a:ea typeface="Courier New" pitchFamily="34" charset="-122"/>
                 <a:cs typeface="Courier New" pitchFamily="34" charset="-120"/>
               </a:rPr>
-              <a:t>sy-subrc</a:t>
+              <a:t> </a:t>
             </a:r>
             <a:r>
               <a:rPr lang="en-US" sz="950" dirty="0">
                 <a:solidFill>
+                  <a:srgbClr val="569CD6"/>
+                </a:solidFill>
+                <a:latin typeface="Courier New" pitchFamily="34" charset="0"/>
+                <a:ea typeface="Courier New" pitchFamily="34" charset="-122"/>
+                <a:cs typeface="Courier New" pitchFamily="34" charset="-120"/>
+              </a:rPr>
+              <a:t>FIELD</a:t>
+            </a:r>
+            <a:r>
+              <a:rPr lang="en-US" sz="950" dirty="0">
+                <a:solidFill>
                   <a:srgbClr val="CCCCCC"/>
                 </a:solidFill>
                 <a:latin typeface="Courier New" pitchFamily="34" charset="0"/>
@@ -12423,40 +12276,7 @@
                 <a:ea typeface="Courier New" pitchFamily="34" charset="-122"/>
                 <a:cs typeface="Courier New" pitchFamily="34" charset="-120"/>
               </a:rPr>
-              <a:t>&lt;</a:t>
-            </a:r>
-            <a:r>
-              <a:rPr lang="en-US" sz="950" dirty="0">
-                <a:solidFill>
-                  <a:srgbClr val="CCCCCC"/>
-                </a:solidFill>
-                <a:latin typeface="Courier New" pitchFamily="34" charset="0"/>
-                <a:ea typeface="Courier New" pitchFamily="34" charset="-122"/>
-                <a:cs typeface="Courier New" pitchFamily="34" charset="-120"/>
-              </a:rPr>
-              <a:t>&gt;</a:t>
-            </a:r>
-            <a:r>
-              <a:rPr lang="en-US" sz="950" dirty="0">
-                <a:solidFill>
-                  <a:srgbClr val="CCCCCC"/>
-                </a:solidFill>
-                <a:latin typeface="Courier New" pitchFamily="34" charset="0"/>
-                <a:ea typeface="Courier New" pitchFamily="34" charset="-122"/>
-                <a:cs typeface="Courier New" pitchFamily="34" charset="-120"/>
-              </a:rPr>
-              <a:t> </a:t>
-            </a:r>
-            <a:r>
-              <a:rPr lang="en-US" sz="950" dirty="0">
-                <a:solidFill>
-                  <a:srgbClr val="B5CEA8"/>
-                </a:solidFill>
-                <a:latin typeface="Courier New" pitchFamily="34" charset="0"/>
-                <a:ea typeface="Courier New" pitchFamily="34" charset="-122"/>
-                <a:cs typeface="Courier New" pitchFamily="34" charset="-120"/>
-              </a:rPr>
-              <a:t>0</a:t>
+              <a:t>iv_actvt</a:t>
             </a:r>
             <a:r>
               <a:rPr lang="en-US" sz="950" dirty="0">
@@ -12487,18 +12307,172 @@
                 <a:ea typeface="Courier New" pitchFamily="34" charset="-122"/>
                 <a:cs typeface="Courier New" pitchFamily="34" charset="-120"/>
               </a:rPr>
-              <a:t>    </a:t>
-            </a:r>
-            <a:r>
-              <a:rPr lang="en-US" sz="950" i="1" dirty="0">
-                <a:solidFill>
-                  <a:srgbClr val="6A9955"/>
-                </a:solidFill>
-                <a:latin typeface="Courier New" pitchFamily="34" charset="0"/>
-                <a:ea typeface="Courier New" pitchFamily="34" charset="-122"/>
-                <a:cs typeface="Courier New" pitchFamily="34" charset="-120"/>
-              </a:rPr>
-              <a:t>" Não veio: não existe ou não é autorizado?</a:t>
+              <a:t>  </a:t>
+            </a:r>
+            <a:r>
+              <a:rPr lang="en-US" sz="950" dirty="0">
+                <a:solidFill>
+                  <a:srgbClr val="CCCCCC"/>
+                </a:solidFill>
+                <a:latin typeface="Courier New" pitchFamily="34" charset="0"/>
+                <a:ea typeface="Courier New" pitchFamily="34" charset="-122"/>
+                <a:cs typeface="Courier New" pitchFamily="34" charset="-120"/>
+              </a:rPr>
+              <a:t>rv_autorizado</a:t>
+            </a:r>
+            <a:r>
+              <a:rPr lang="en-US" sz="950" dirty="0">
+                <a:solidFill>
+                  <a:srgbClr val="CCCCCC"/>
+                </a:solidFill>
+                <a:latin typeface="Courier New" pitchFamily="34" charset="0"/>
+                <a:ea typeface="Courier New" pitchFamily="34" charset="-122"/>
+                <a:cs typeface="Courier New" pitchFamily="34" charset="-120"/>
+              </a:rPr>
+              <a:t> </a:t>
+            </a:r>
+            <a:r>
+              <a:rPr lang="en-US" sz="950" dirty="0">
+                <a:solidFill>
+                  <a:srgbClr val="CCCCCC"/>
+                </a:solidFill>
+                <a:latin typeface="Courier New" pitchFamily="34" charset="0"/>
+                <a:ea typeface="Courier New" pitchFamily="34" charset="-122"/>
+                <a:cs typeface="Courier New" pitchFamily="34" charset="-120"/>
+              </a:rPr>
+              <a:t>=</a:t>
+            </a:r>
+            <a:r>
+              <a:rPr lang="en-US" sz="950" dirty="0">
+                <a:solidFill>
+                  <a:srgbClr val="CCCCCC"/>
+                </a:solidFill>
+                <a:latin typeface="Courier New" pitchFamily="34" charset="0"/>
+                <a:ea typeface="Courier New" pitchFamily="34" charset="-122"/>
+                <a:cs typeface="Courier New" pitchFamily="34" charset="-120"/>
+              </a:rPr>
+              <a:t> </a:t>
+            </a:r>
+            <a:r>
+              <a:rPr lang="en-US" sz="950" dirty="0">
+                <a:solidFill>
+                  <a:srgbClr val="CCCCCC"/>
+                </a:solidFill>
+                <a:latin typeface="Courier New" pitchFamily="34" charset="0"/>
+                <a:ea typeface="Courier New" pitchFamily="34" charset="-122"/>
+                <a:cs typeface="Courier New" pitchFamily="34" charset="-120"/>
+              </a:rPr>
+              <a:t>xsdbool</a:t>
+            </a:r>
+            <a:r>
+              <a:rPr lang="en-US" sz="950" dirty="0">
+                <a:solidFill>
+                  <a:srgbClr val="CCCCCC"/>
+                </a:solidFill>
+                <a:latin typeface="Courier New" pitchFamily="34" charset="0"/>
+                <a:ea typeface="Courier New" pitchFamily="34" charset="-122"/>
+                <a:cs typeface="Courier New" pitchFamily="34" charset="-120"/>
+              </a:rPr>
+              <a:t>(</a:t>
+            </a:r>
+            <a:r>
+              <a:rPr lang="en-US" sz="950" dirty="0">
+                <a:solidFill>
+                  <a:srgbClr val="CCCCCC"/>
+                </a:solidFill>
+                <a:latin typeface="Courier New" pitchFamily="34" charset="0"/>
+                <a:ea typeface="Courier New" pitchFamily="34" charset="-122"/>
+                <a:cs typeface="Courier New" pitchFamily="34" charset="-120"/>
+              </a:rPr>
+              <a:t> </a:t>
+            </a:r>
+            <a:r>
+              <a:rPr lang="en-US" sz="950" dirty="0">
+                <a:solidFill>
+                  <a:srgbClr val="CCCCCC"/>
+                </a:solidFill>
+                <a:latin typeface="Courier New" pitchFamily="34" charset="0"/>
+                <a:ea typeface="Courier New" pitchFamily="34" charset="-122"/>
+                <a:cs typeface="Courier New" pitchFamily="34" charset="-120"/>
+              </a:rPr>
+              <a:t>sy-subrc</a:t>
+            </a:r>
+            <a:r>
+              <a:rPr lang="en-US" sz="950" dirty="0">
+                <a:solidFill>
+                  <a:srgbClr val="CCCCCC"/>
+                </a:solidFill>
+                <a:latin typeface="Courier New" pitchFamily="34" charset="0"/>
+                <a:ea typeface="Courier New" pitchFamily="34" charset="-122"/>
+                <a:cs typeface="Courier New" pitchFamily="34" charset="-120"/>
+              </a:rPr>
+              <a:t> </a:t>
+            </a:r>
+            <a:r>
+              <a:rPr lang="en-US" sz="950" dirty="0">
+                <a:solidFill>
+                  <a:srgbClr val="CCCCCC"/>
+                </a:solidFill>
+                <a:latin typeface="Courier New" pitchFamily="34" charset="0"/>
+                <a:ea typeface="Courier New" pitchFamily="34" charset="-122"/>
+                <a:cs typeface="Courier New" pitchFamily="34" charset="-120"/>
+              </a:rPr>
+              <a:t>=</a:t>
+            </a:r>
+            <a:r>
+              <a:rPr lang="en-US" sz="950" dirty="0">
+                <a:solidFill>
+                  <a:srgbClr val="CCCCCC"/>
+                </a:solidFill>
+                <a:latin typeface="Courier New" pitchFamily="34" charset="0"/>
+                <a:ea typeface="Courier New" pitchFamily="34" charset="-122"/>
+                <a:cs typeface="Courier New" pitchFamily="34" charset="-120"/>
+              </a:rPr>
+              <a:t> </a:t>
+            </a:r>
+            <a:r>
+              <a:rPr lang="en-US" sz="950" dirty="0">
+                <a:solidFill>
+                  <a:srgbClr val="B5CEA8"/>
+                </a:solidFill>
+                <a:latin typeface="Courier New" pitchFamily="34" charset="0"/>
+                <a:ea typeface="Courier New" pitchFamily="34" charset="-122"/>
+                <a:cs typeface="Courier New" pitchFamily="34" charset="-120"/>
+              </a:rPr>
+              <a:t>0</a:t>
+            </a:r>
+            <a:r>
+              <a:rPr lang="en-US" sz="950" dirty="0">
+                <a:solidFill>
+                  <a:srgbClr val="CCCCCC"/>
+                </a:solidFill>
+                <a:latin typeface="Courier New" pitchFamily="34" charset="0"/>
+                <a:ea typeface="Courier New" pitchFamily="34" charset="-122"/>
+                <a:cs typeface="Courier New" pitchFamily="34" charset="-120"/>
+              </a:rPr>
+              <a:t> </a:t>
+            </a:r>
+            <a:r>
+              <a:rPr lang="en-US" sz="950" dirty="0">
+                <a:solidFill>
+                  <a:srgbClr val="CCCCCC"/>
+                </a:solidFill>
+                <a:latin typeface="Courier New" pitchFamily="34" charset="0"/>
+                <a:ea typeface="Courier New" pitchFamily="34" charset="-122"/>
+                <a:cs typeface="Courier New" pitchFamily="34" charset="-120"/>
+              </a:rPr>
+              <a:t>)</a:t>
+            </a:r>
+            <a:r>
+              <a:rPr lang="en-US" sz="950" dirty="0">
+                <a:solidFill>
+                  <a:srgbClr val="CCCCCC"/>
+                </a:solidFill>
+                <a:latin typeface="Courier New" pitchFamily="34" charset="0"/>
+                <a:ea typeface="Courier New" pitchFamily="34" charset="-122"/>
+                <a:cs typeface="Courier New" pitchFamily="34" charset="-120"/>
+              </a:rPr>
+              <a:t>.</a:t>
             </a:r>
             <a:endParaRPr lang="en-US" sz="950" dirty="0"/>
           </a:p>
@@ -12512,68 +12486,24 @@
             <a:r>
               <a:rPr lang="en-US" sz="950" dirty="0">
                 <a:solidFill>
+                  <a:srgbClr val="569CD6"/>
+                </a:solidFill>
+                <a:latin typeface="Courier New" pitchFamily="34" charset="0"/>
+                <a:ea typeface="Courier New" pitchFamily="34" charset="-122"/>
+                <a:cs typeface="Courier New" pitchFamily="34" charset="-120"/>
+              </a:rPr>
+              <a:t>ENDMETHOD</a:t>
+            </a:r>
+            <a:r>
+              <a:rPr lang="en-US" sz="950" dirty="0">
+                <a:solidFill>
                   <a:srgbClr val="CCCCCC"/>
                 </a:solidFill>
                 <a:latin typeface="Courier New" pitchFamily="34" charset="0"/>
                 <a:ea typeface="Courier New" pitchFamily="34" charset="-122"/>
                 <a:cs typeface="Courier New" pitchFamily="34" charset="-120"/>
               </a:rPr>
-              <a:t>    </a:t>
-            </a:r>
-            <a:r>
-              <a:rPr lang="en-US" sz="950" dirty="0">
-                <a:solidFill>
-                  <a:srgbClr val="569CD6"/>
-                </a:solidFill>
-                <a:latin typeface="Courier New" pitchFamily="34" charset="0"/>
-                <a:ea typeface="Courier New" pitchFamily="34" charset="-122"/>
-                <a:cs typeface="Courier New" pitchFamily="34" charset="-120"/>
-              </a:rPr>
-              <a:t>AUTHORITY-CHECK</a:t>
-            </a:r>
-            <a:r>
-              <a:rPr lang="en-US" sz="950" dirty="0">
-                <a:solidFill>
-                  <a:srgbClr val="CCCCCC"/>
-                </a:solidFill>
-                <a:latin typeface="Courier New" pitchFamily="34" charset="0"/>
-                <a:ea typeface="Courier New" pitchFamily="34" charset="-122"/>
-                <a:cs typeface="Courier New" pitchFamily="34" charset="-120"/>
-              </a:rPr>
-              <a:t> </a:t>
-            </a:r>
-            <a:r>
-              <a:rPr lang="en-US" sz="950" dirty="0">
-                <a:solidFill>
-                  <a:srgbClr val="569CD6"/>
-                </a:solidFill>
-                <a:latin typeface="Courier New" pitchFamily="34" charset="0"/>
-                <a:ea typeface="Courier New" pitchFamily="34" charset="-122"/>
-                <a:cs typeface="Courier New" pitchFamily="34" charset="-120"/>
-              </a:rPr>
-              <a:t>OBJECT</a:t>
-            </a:r>
-            <a:r>
-              <a:rPr lang="en-US" sz="950" dirty="0">
-                <a:solidFill>
-                  <a:srgbClr val="CCCCCC"/>
-                </a:solidFill>
-                <a:latin typeface="Courier New" pitchFamily="34" charset="0"/>
-                <a:ea typeface="Courier New" pitchFamily="34" charset="-122"/>
-                <a:cs typeface="Courier New" pitchFamily="34" charset="-120"/>
-              </a:rPr>
-              <a:t> </a:t>
-            </a:r>
-            <a:r>
-              <a:rPr lang="en-US" sz="950" dirty="0">
-                <a:solidFill>
-                  <a:srgbClr val="CE9178"/>
-                </a:solidFill>
-                <a:latin typeface="Courier New" pitchFamily="34" charset="0"/>
-                <a:ea typeface="Courier New" pitchFamily="34" charset="-122"/>
-                <a:cs typeface="Courier New" pitchFamily="34" charset="-120"/>
-              </a:rPr>
-              <a:t>'/LRN/CARR'</a:t>
+              <a:t>.</a:t>
             </a:r>
             <a:endParaRPr lang="en-US" sz="950" dirty="0"/>
           </a:p>
@@ -12587,90 +12517,13 @@
             <a:r>
               <a:rPr lang="en-US" sz="950" dirty="0">
                 <a:solidFill>
-                  <a:srgbClr val="CCCCCC"/>
-                </a:solidFill>
-                <a:latin typeface="Courier New" pitchFamily="34" charset="0"/>
-                <a:ea typeface="Courier New" pitchFamily="34" charset="-122"/>
-                <a:cs typeface="Courier New" pitchFamily="34" charset="-120"/>
-              </a:rPr>
-              <a:t>      </a:t>
-            </a:r>
-            <a:r>
-              <a:rPr lang="en-US" sz="950" dirty="0">
-                <a:solidFill>
-                  <a:srgbClr val="569CD6"/>
-                </a:solidFill>
-                <a:latin typeface="Courier New" pitchFamily="34" charset="0"/>
-                <a:ea typeface="Courier New" pitchFamily="34" charset="-122"/>
-                <a:cs typeface="Courier New" pitchFamily="34" charset="-120"/>
-              </a:rPr>
-              <a:t>ID</a:t>
-            </a:r>
-            <a:r>
-              <a:rPr lang="en-US" sz="950" dirty="0">
-                <a:solidFill>
-                  <a:srgbClr val="CCCCCC"/>
+                  <a:srgbClr val="000000"/>
                 </a:solidFill>
                 <a:latin typeface="Courier New" pitchFamily="34" charset="0"/>
                 <a:ea typeface="Courier New" pitchFamily="34" charset="-122"/>
                 <a:cs typeface="Courier New" pitchFamily="34" charset="-120"/>
               </a:rPr>
               <a:t> </a:t>
-            </a:r>
-            <a:r>
-              <a:rPr lang="en-US" sz="950" dirty="0">
-                <a:solidFill>
-                  <a:srgbClr val="CE9178"/>
-                </a:solidFill>
-                <a:latin typeface="Courier New" pitchFamily="34" charset="0"/>
-                <a:ea typeface="Courier New" pitchFamily="34" charset="-122"/>
-                <a:cs typeface="Courier New" pitchFamily="34" charset="-120"/>
-              </a:rPr>
-              <a:t>'/LRN/CARR'</a:t>
-            </a:r>
-            <a:r>
-              <a:rPr lang="en-US" sz="950" dirty="0">
-                <a:solidFill>
-                  <a:srgbClr val="CCCCCC"/>
-                </a:solidFill>
-                <a:latin typeface="Courier New" pitchFamily="34" charset="0"/>
-                <a:ea typeface="Courier New" pitchFamily="34" charset="-122"/>
-                <a:cs typeface="Courier New" pitchFamily="34" charset="-120"/>
-              </a:rPr>
-              <a:t> </a:t>
-            </a:r>
-            <a:r>
-              <a:rPr lang="en-US" sz="950" dirty="0">
-                <a:solidFill>
-                  <a:srgbClr val="569CD6"/>
-                </a:solidFill>
-                <a:latin typeface="Courier New" pitchFamily="34" charset="0"/>
-                <a:ea typeface="Courier New" pitchFamily="34" charset="-122"/>
-                <a:cs typeface="Courier New" pitchFamily="34" charset="-120"/>
-              </a:rPr>
-              <a:t>FIELD</a:t>
-            </a:r>
-            <a:r>
-              <a:rPr lang="en-US" sz="950" dirty="0">
-                <a:solidFill>
-                  <a:srgbClr val="CCCCCC"/>
-                </a:solidFill>
-                <a:latin typeface="Courier New" pitchFamily="34" charset="0"/>
-                <a:ea typeface="Courier New" pitchFamily="34" charset="-122"/>
-                <a:cs typeface="Courier New" pitchFamily="34" charset="-120"/>
-              </a:rPr>
-              <a:t> </a:t>
-            </a:r>
-            <a:r>
-              <a:rPr lang="en-US" sz="950" dirty="0">
-                <a:solidFill>
-                  <a:srgbClr val="CCCCCC"/>
-                </a:solidFill>
-                <a:latin typeface="Courier New" pitchFamily="34" charset="0"/>
-                <a:ea typeface="Courier New" pitchFamily="34" charset="-122"/>
-                <a:cs typeface="Courier New" pitchFamily="34" charset="-120"/>
-              </a:rPr>
-              <a:t>i_carrier_id</a:t>
             </a:r>
             <a:endParaRPr lang="en-US" sz="950" dirty="0"/>
           </a:p>
@@ -12682,103 +12535,15 @@
               <a:buNone/>
             </a:pPr>
             <a:r>
-              <a:rPr lang="en-US" sz="950" dirty="0">
-                <a:solidFill>
-                  <a:srgbClr val="CCCCCC"/>
-                </a:solidFill>
-                <a:latin typeface="Courier New" pitchFamily="34" charset="0"/>
-                <a:ea typeface="Courier New" pitchFamily="34" charset="-122"/>
-                <a:cs typeface="Courier New" pitchFamily="34" charset="-120"/>
-              </a:rPr>
-              <a:t>      </a:t>
-            </a:r>
-            <a:r>
-              <a:rPr lang="en-US" sz="950" dirty="0">
-                <a:solidFill>
-                  <a:srgbClr val="569CD6"/>
-                </a:solidFill>
-                <a:latin typeface="Courier New" pitchFamily="34" charset="0"/>
-                <a:ea typeface="Courier New" pitchFamily="34" charset="-122"/>
-                <a:cs typeface="Courier New" pitchFamily="34" charset="-120"/>
-              </a:rPr>
-              <a:t>ID</a:t>
-            </a:r>
-            <a:r>
-              <a:rPr lang="en-US" sz="950" dirty="0">
-                <a:solidFill>
-                  <a:srgbClr val="CCCCCC"/>
-                </a:solidFill>
-                <a:latin typeface="Courier New" pitchFamily="34" charset="0"/>
-                <a:ea typeface="Courier New" pitchFamily="34" charset="-122"/>
-                <a:cs typeface="Courier New" pitchFamily="34" charset="-120"/>
-              </a:rPr>
-              <a:t> </a:t>
-            </a:r>
-            <a:r>
-              <a:rPr lang="en-US" sz="950" dirty="0">
-                <a:solidFill>
-                  <a:srgbClr val="CE9178"/>
-                </a:solidFill>
-                <a:latin typeface="Courier New" pitchFamily="34" charset="0"/>
-                <a:ea typeface="Courier New" pitchFamily="34" charset="-122"/>
-                <a:cs typeface="Courier New" pitchFamily="34" charset="-120"/>
-              </a:rPr>
-              <a:t>'ACTVT'</a:t>
-            </a:r>
-            <a:r>
-              <a:rPr lang="en-US" sz="950" dirty="0">
-                <a:solidFill>
-                  <a:srgbClr val="CCCCCC"/>
-                </a:solidFill>
-                <a:latin typeface="Courier New" pitchFamily="34" charset="0"/>
-                <a:ea typeface="Courier New" pitchFamily="34" charset="-122"/>
-                <a:cs typeface="Courier New" pitchFamily="34" charset="-120"/>
-              </a:rPr>
-              <a:t>     </a:t>
-            </a:r>
-            <a:r>
-              <a:rPr lang="en-US" sz="950" dirty="0">
-                <a:solidFill>
-                  <a:srgbClr val="569CD6"/>
-                </a:solidFill>
-                <a:latin typeface="Courier New" pitchFamily="34" charset="0"/>
-                <a:ea typeface="Courier New" pitchFamily="34" charset="-122"/>
-                <a:cs typeface="Courier New" pitchFamily="34" charset="-120"/>
-              </a:rPr>
-              <a:t>FIELD</a:t>
-            </a:r>
-            <a:r>
-              <a:rPr lang="en-US" sz="950" dirty="0">
-                <a:solidFill>
-                  <a:srgbClr val="CCCCCC"/>
-                </a:solidFill>
-                <a:latin typeface="Courier New" pitchFamily="34" charset="0"/>
-                <a:ea typeface="Courier New" pitchFamily="34" charset="-122"/>
-                <a:cs typeface="Courier New" pitchFamily="34" charset="-120"/>
-              </a:rPr>
-              <a:t> </a:t>
-            </a:r>
-            <a:r>
-              <a:rPr lang="en-US" sz="950" dirty="0">
-                <a:solidFill>
-                  <a:srgbClr val="CE9178"/>
-                </a:solidFill>
-                <a:latin typeface="Courier New" pitchFamily="34" charset="0"/>
-                <a:ea typeface="Courier New" pitchFamily="34" charset="-122"/>
-                <a:cs typeface="Courier New" pitchFamily="34" charset="-120"/>
-              </a:rPr>
-              <a:t>'03'</a:t>
-            </a:r>
-            <a:r>
-              <a:rPr lang="en-US" sz="950" dirty="0">
-                <a:solidFill>
-                  <a:srgbClr val="CCCCCC"/>
-                </a:solidFill>
-                <a:latin typeface="Courier New" pitchFamily="34" charset="0"/>
-                <a:ea typeface="Courier New" pitchFamily="34" charset="-122"/>
-                <a:cs typeface="Courier New" pitchFamily="34" charset="-120"/>
-              </a:rPr>
-              <a:t>.</a:t>
+              <a:rPr lang="en-US" sz="950" i="1" dirty="0">
+                <a:solidFill>
+                  <a:srgbClr val="6A9955"/>
+                </a:solidFill>
+                <a:latin typeface="Courier New" pitchFamily="34" charset="0"/>
+                <a:ea typeface="Courier New" pitchFamily="34" charset="-122"/>
+                <a:cs typeface="Courier New" pitchFamily="34" charset="-120"/>
+              </a:rPr>
+              <a:t>" BO Pedido: get_global_authorizations</a:t>
             </a:r>
             <a:endParaRPr lang="en-US" sz="950" dirty="0"/>
           </a:p>
@@ -12792,24 +12557,35 @@
             <a:r>
               <a:rPr lang="en-US" sz="950" dirty="0">
                 <a:solidFill>
+                  <a:srgbClr val="569CD6"/>
+                </a:solidFill>
+                <a:latin typeface="Courier New" pitchFamily="34" charset="0"/>
+                <a:ea typeface="Courier New" pitchFamily="34" charset="-122"/>
+                <a:cs typeface="Courier New" pitchFamily="34" charset="-120"/>
+              </a:rPr>
+              <a:t>IF</a:t>
+            </a:r>
+            <a:r>
+              <a:rPr lang="en-US" sz="950" dirty="0">
+                <a:solidFill>
                   <a:srgbClr val="CCCCCC"/>
                 </a:solidFill>
                 <a:latin typeface="Courier New" pitchFamily="34" charset="0"/>
                 <a:ea typeface="Courier New" pitchFamily="34" charset="-122"/>
                 <a:cs typeface="Courier New" pitchFamily="34" charset="-120"/>
               </a:rPr>
-              <a:t>    </a:t>
+              <a:t> </a:t>
             </a:r>
             <a:r>
               <a:rPr lang="en-US" sz="950" dirty="0">
                 <a:solidFill>
-                  <a:srgbClr val="569CD6"/>
-                </a:solidFill>
-                <a:latin typeface="Courier New" pitchFamily="34" charset="0"/>
-                <a:ea typeface="Courier New" pitchFamily="34" charset="-122"/>
-                <a:cs typeface="Courier New" pitchFamily="34" charset="-120"/>
-              </a:rPr>
-              <a:t>IF</a:t>
+                  <a:srgbClr val="CCCCCC"/>
+                </a:solidFill>
+                <a:latin typeface="Courier New" pitchFamily="34" charset="0"/>
+                <a:ea typeface="Courier New" pitchFamily="34" charset="-122"/>
+                <a:cs typeface="Courier New" pitchFamily="34" charset="-120"/>
+              </a:rPr>
+              <a:t>requested_authorizations-</a:t>
             </a:r>
             <a:r>
               <a:rPr lang="en-US" sz="950" dirty="0">
@@ -12820,6 +12596,28 @@
                 <a:ea typeface="Courier New" pitchFamily="34" charset="-122"/>
                 <a:cs typeface="Courier New" pitchFamily="34" charset="-120"/>
               </a:rPr>
+              <a:t>%</a:t>
+            </a:r>
+            <a:r>
+              <a:rPr lang="en-US" sz="950" dirty="0">
+                <a:solidFill>
+                  <a:srgbClr val="CCCCCC"/>
+                </a:solidFill>
+                <a:latin typeface="Courier New" pitchFamily="34" charset="0"/>
+                <a:ea typeface="Courier New" pitchFamily="34" charset="-122"/>
+                <a:cs typeface="Courier New" pitchFamily="34" charset="-120"/>
+              </a:rPr>
+              <a:t>create</a:t>
+            </a:r>
+            <a:r>
+              <a:rPr lang="en-US" sz="950" dirty="0">
+                <a:solidFill>
+                  <a:srgbClr val="CCCCCC"/>
+                </a:solidFill>
+                <a:latin typeface="Courier New" pitchFamily="34" charset="0"/>
+                <a:ea typeface="Courier New" pitchFamily="34" charset="-122"/>
+                <a:cs typeface="Courier New" pitchFamily="34" charset="-120"/>
+              </a:rPr>
               <a:t> </a:t>
             </a:r>
             <a:r>
@@ -12831,7 +12629,7 @@
                 <a:ea typeface="Courier New" pitchFamily="34" charset="-122"/>
                 <a:cs typeface="Courier New" pitchFamily="34" charset="-120"/>
               </a:rPr>
-              <a:t>sy-subrc</a:t>
+              <a:t>=</a:t>
             </a:r>
             <a:r>
               <a:rPr lang="en-US" sz="950" dirty="0">
@@ -12847,46 +12645,24 @@
             <a:r>
               <a:rPr lang="en-US" sz="950" dirty="0">
                 <a:solidFill>
+                  <a:srgbClr val="4EC9B0"/>
+                </a:solidFill>
+                <a:latin typeface="Courier New" pitchFamily="34" charset="0"/>
+                <a:ea typeface="Courier New" pitchFamily="34" charset="-122"/>
+                <a:cs typeface="Courier New" pitchFamily="34" charset="-120"/>
+              </a:rPr>
+              <a:t>if_abap_behv=&gt;</a:t>
+            </a:r>
+            <a:r>
+              <a:rPr lang="en-US" sz="950" dirty="0">
+                <a:solidFill>
                   <a:srgbClr val="CCCCCC"/>
                 </a:solidFill>
                 <a:latin typeface="Courier New" pitchFamily="34" charset="0"/>
                 <a:ea typeface="Courier New" pitchFamily="34" charset="-122"/>
                 <a:cs typeface="Courier New" pitchFamily="34" charset="-120"/>
               </a:rPr>
-              <a:t>&lt;</a:t>
-            </a:r>
-            <a:r>
-              <a:rPr lang="en-US" sz="950" dirty="0">
-                <a:solidFill>
-                  <a:srgbClr val="CCCCCC"/>
-                </a:solidFill>
-                <a:latin typeface="Courier New" pitchFamily="34" charset="0"/>
-                <a:ea typeface="Courier New" pitchFamily="34" charset="-122"/>
-                <a:cs typeface="Courier New" pitchFamily="34" charset="-120"/>
-              </a:rPr>
-              <a:t>&gt;</a:t>
-            </a:r>
-            <a:r>
-              <a:rPr lang="en-US" sz="950" dirty="0">
-                <a:solidFill>
-                  <a:srgbClr val="CCCCCC"/>
-                </a:solidFill>
-                <a:latin typeface="Courier New" pitchFamily="34" charset="0"/>
-                <a:ea typeface="Courier New" pitchFamily="34" charset="-122"/>
-                <a:cs typeface="Courier New" pitchFamily="34" charset="-120"/>
-              </a:rPr>
-              <a:t> </a:t>
-            </a:r>
-            <a:r>
-              <a:rPr lang="en-US" sz="950" dirty="0">
-                <a:solidFill>
-                  <a:srgbClr val="B5CEA8"/>
-                </a:solidFill>
-                <a:latin typeface="Courier New" pitchFamily="34" charset="0"/>
-                <a:ea typeface="Courier New" pitchFamily="34" charset="-122"/>
-                <a:cs typeface="Courier New" pitchFamily="34" charset="-120"/>
-              </a:rPr>
-              <a:t>0</a:t>
+              <a:t>mk-on</a:t>
             </a:r>
             <a:r>
               <a:rPr lang="en-US" sz="950" dirty="0">
@@ -12917,18 +12693,84 @@
                 <a:ea typeface="Courier New" pitchFamily="34" charset="-122"/>
                 <a:cs typeface="Courier New" pitchFamily="34" charset="-120"/>
               </a:rPr>
-              <a:t>      </a:t>
+              <a:t>  </a:t>
             </a:r>
             <a:r>
               <a:rPr lang="en-US" sz="950" dirty="0">
                 <a:solidFill>
+                  <a:srgbClr val="CCCCCC"/>
+                </a:solidFill>
+                <a:latin typeface="Courier New" pitchFamily="34" charset="0"/>
+                <a:ea typeface="Courier New" pitchFamily="34" charset="-122"/>
+                <a:cs typeface="Courier New" pitchFamily="34" charset="-120"/>
+              </a:rPr>
+              <a:t>result-</a:t>
+            </a:r>
+            <a:r>
+              <a:rPr lang="en-US" sz="950" dirty="0">
+                <a:solidFill>
+                  <a:srgbClr val="CCCCCC"/>
+                </a:solidFill>
+                <a:latin typeface="Courier New" pitchFamily="34" charset="0"/>
+                <a:ea typeface="Courier New" pitchFamily="34" charset="-122"/>
+                <a:cs typeface="Courier New" pitchFamily="34" charset="-120"/>
+              </a:rPr>
+              <a:t>%</a:t>
+            </a:r>
+            <a:r>
+              <a:rPr lang="en-US" sz="950" dirty="0">
+                <a:solidFill>
+                  <a:srgbClr val="CCCCCC"/>
+                </a:solidFill>
+                <a:latin typeface="Courier New" pitchFamily="34" charset="0"/>
+                <a:ea typeface="Courier New" pitchFamily="34" charset="-122"/>
+                <a:cs typeface="Courier New" pitchFamily="34" charset="-120"/>
+              </a:rPr>
+              <a:t>create</a:t>
+            </a:r>
+            <a:r>
+              <a:rPr lang="en-US" sz="950" dirty="0">
+                <a:solidFill>
+                  <a:srgbClr val="CCCCCC"/>
+                </a:solidFill>
+                <a:latin typeface="Courier New" pitchFamily="34" charset="0"/>
+                <a:ea typeface="Courier New" pitchFamily="34" charset="-122"/>
+                <a:cs typeface="Courier New" pitchFamily="34" charset="-120"/>
+              </a:rPr>
+              <a:t> </a:t>
+            </a:r>
+            <a:r>
+              <a:rPr lang="en-US" sz="950" dirty="0">
+                <a:solidFill>
+                  <a:srgbClr val="CCCCCC"/>
+                </a:solidFill>
+                <a:latin typeface="Courier New" pitchFamily="34" charset="0"/>
+                <a:ea typeface="Courier New" pitchFamily="34" charset="-122"/>
+                <a:cs typeface="Courier New" pitchFamily="34" charset="-120"/>
+              </a:rPr>
+              <a:t>=</a:t>
+            </a:r>
+            <a:r>
+              <a:rPr lang="en-US" sz="950" dirty="0">
+                <a:solidFill>
+                  <a:srgbClr val="CCCCCC"/>
+                </a:solidFill>
+                <a:latin typeface="Courier New" pitchFamily="34" charset="0"/>
+                <a:ea typeface="Courier New" pitchFamily="34" charset="-122"/>
+                <a:cs typeface="Courier New" pitchFamily="34" charset="-120"/>
+              </a:rPr>
+              <a:t> </a:t>
+            </a:r>
+            <a:r>
+              <a:rPr lang="en-US" sz="950" dirty="0">
+                <a:solidFill>
                   <a:srgbClr val="569CD6"/>
                 </a:solidFill>
                 <a:latin typeface="Courier New" pitchFamily="34" charset="0"/>
                 <a:ea typeface="Courier New" pitchFamily="34" charset="-122"/>
                 <a:cs typeface="Courier New" pitchFamily="34" charset="-120"/>
               </a:rPr>
-              <a:t>RAISE</a:t>
+              <a:t>COND</a:t>
             </a:r>
             <a:r>
               <a:rPr lang="en-US" sz="950" dirty="0">
@@ -12944,13 +12786,13 @@
             <a:r>
               <a:rPr lang="en-US" sz="950" dirty="0">
                 <a:solidFill>
-                  <a:srgbClr val="569CD6"/>
-                </a:solidFill>
-                <a:latin typeface="Courier New" pitchFamily="34" charset="0"/>
-                <a:ea typeface="Courier New" pitchFamily="34" charset="-122"/>
-                <a:cs typeface="Courier New" pitchFamily="34" charset="-120"/>
-              </a:rPr>
-              <a:t>EXCEPTION</a:t>
+                  <a:srgbClr val="CCCCCC"/>
+                </a:solidFill>
+                <a:latin typeface="Courier New" pitchFamily="34" charset="0"/>
+                <a:ea typeface="Courier New" pitchFamily="34" charset="-122"/>
+                <a:cs typeface="Courier New" pitchFamily="34" charset="-120"/>
+              </a:rPr>
+              <a:t>#</a:t>
             </a:r>
             <a:r>
               <a:rPr lang="en-US" sz="950" dirty="0">
@@ -12961,51 +12803,7 @@
                 <a:ea typeface="Courier New" pitchFamily="34" charset="-122"/>
                 <a:cs typeface="Courier New" pitchFamily="34" charset="-120"/>
               </a:rPr>
-              <a:t> </a:t>
-            </a:r>
-            <a:r>
-              <a:rPr lang="en-US" sz="950" dirty="0">
-                <a:solidFill>
-                  <a:srgbClr val="569CD6"/>
-                </a:solidFill>
-                <a:latin typeface="Courier New" pitchFamily="34" charset="0"/>
-                <a:ea typeface="Courier New" pitchFamily="34" charset="-122"/>
-                <a:cs typeface="Courier New" pitchFamily="34" charset="-120"/>
-              </a:rPr>
-              <a:t>TYPE</a:t>
-            </a:r>
-            <a:r>
-              <a:rPr lang="en-US" sz="950" dirty="0">
-                <a:solidFill>
-                  <a:srgbClr val="CCCCCC"/>
-                </a:solidFill>
-                <a:latin typeface="Courier New" pitchFamily="34" charset="0"/>
-                <a:ea typeface="Courier New" pitchFamily="34" charset="-122"/>
-                <a:cs typeface="Courier New" pitchFamily="34" charset="-120"/>
-              </a:rPr>
-              <a:t> </a:t>
-            </a:r>
-            <a:r>
-              <a:rPr lang="en-US" sz="950" dirty="0">
-                <a:solidFill>
-                  <a:srgbClr val="4EC9B0"/>
-                </a:solidFill>
-                <a:latin typeface="Courier New" pitchFamily="34" charset="0"/>
-                <a:ea typeface="Courier New" pitchFamily="34" charset="-122"/>
-                <a:cs typeface="Courier New" pitchFamily="34" charset="-120"/>
-              </a:rPr>
-              <a:t>cx_abap_auth_check_exception</a:t>
-            </a:r>
-            <a:r>
-              <a:rPr lang="en-US" sz="950" dirty="0">
-                <a:solidFill>
-                  <a:srgbClr val="CCCCCC"/>
-                </a:solidFill>
-                <a:latin typeface="Courier New" pitchFamily="34" charset="0"/>
-                <a:ea typeface="Courier New" pitchFamily="34" charset="-122"/>
-                <a:cs typeface="Courier New" pitchFamily="34" charset="-120"/>
-              </a:rPr>
-              <a:t>.</a:t>
+              <a:t>(</a:t>
             </a:r>
             <a:endParaRPr lang="en-US" sz="950" dirty="0"/>
           </a:p>
@@ -13036,7 +12834,7 @@
                 <a:ea typeface="Courier New" pitchFamily="34" charset="-122"/>
                 <a:cs typeface="Courier New" pitchFamily="34" charset="-120"/>
               </a:rPr>
-              <a:t>ENDIF</a:t>
+              <a:t>WHEN</a:t>
             </a:r>
             <a:r>
               <a:rPr lang="en-US" sz="950" dirty="0">
@@ -13047,7 +12845,106 @@
                 <a:ea typeface="Courier New" pitchFamily="34" charset="-122"/>
                 <a:cs typeface="Courier New" pitchFamily="34" charset="-120"/>
               </a:rPr>
-              <a:t>.</a:t>
+              <a:t> </a:t>
+            </a:r>
+            <a:r>
+              <a:rPr lang="en-US" sz="950" dirty="0">
+                <a:solidFill>
+                  <a:srgbClr val="4EC9B0"/>
+                </a:solidFill>
+                <a:latin typeface="Courier New" pitchFamily="34" charset="0"/>
+                <a:ea typeface="Courier New" pitchFamily="34" charset="-122"/>
+                <a:cs typeface="Courier New" pitchFamily="34" charset="-120"/>
+              </a:rPr>
+              <a:t>zcl_pc_auth=&gt;</a:t>
+            </a:r>
+            <a:r>
+              <a:rPr lang="en-US" sz="950" dirty="0">
+                <a:solidFill>
+                  <a:srgbClr val="CCCCCC"/>
+                </a:solidFill>
+                <a:latin typeface="Courier New" pitchFamily="34" charset="0"/>
+                <a:ea typeface="Courier New" pitchFamily="34" charset="-122"/>
+                <a:cs typeface="Courier New" pitchFamily="34" charset="-120"/>
+              </a:rPr>
+              <a:t>pedido_pode_criar</a:t>
+            </a:r>
+            <a:r>
+              <a:rPr lang="en-US" sz="950" dirty="0">
+                <a:solidFill>
+                  <a:srgbClr val="CCCCCC"/>
+                </a:solidFill>
+                <a:latin typeface="Courier New" pitchFamily="34" charset="0"/>
+                <a:ea typeface="Courier New" pitchFamily="34" charset="-122"/>
+                <a:cs typeface="Courier New" pitchFamily="34" charset="-120"/>
+              </a:rPr>
+              <a:t>(</a:t>
+            </a:r>
+            <a:r>
+              <a:rPr lang="en-US" sz="950" dirty="0">
+                <a:solidFill>
+                  <a:srgbClr val="CCCCCC"/>
+                </a:solidFill>
+                <a:latin typeface="Courier New" pitchFamily="34" charset="0"/>
+                <a:ea typeface="Courier New" pitchFamily="34" charset="-122"/>
+                <a:cs typeface="Courier New" pitchFamily="34" charset="-120"/>
+              </a:rPr>
+              <a:t> </a:t>
+            </a:r>
+            <a:r>
+              <a:rPr lang="en-US" sz="950" dirty="0">
+                <a:solidFill>
+                  <a:srgbClr val="CCCCCC"/>
+                </a:solidFill>
+                <a:latin typeface="Courier New" pitchFamily="34" charset="0"/>
+                <a:ea typeface="Courier New" pitchFamily="34" charset="-122"/>
+                <a:cs typeface="Courier New" pitchFamily="34" charset="-120"/>
+              </a:rPr>
+              <a:t>)</a:t>
+            </a:r>
+            <a:r>
+              <a:rPr lang="en-US" sz="950" dirty="0">
+                <a:solidFill>
+                  <a:srgbClr val="CCCCCC"/>
+                </a:solidFill>
+                <a:latin typeface="Courier New" pitchFamily="34" charset="0"/>
+                <a:ea typeface="Courier New" pitchFamily="34" charset="-122"/>
+                <a:cs typeface="Courier New" pitchFamily="34" charset="-120"/>
+              </a:rPr>
+              <a:t> </a:t>
+            </a:r>
+            <a:r>
+              <a:rPr lang="en-US" sz="950" dirty="0">
+                <a:solidFill>
+                  <a:srgbClr val="CCCCCC"/>
+                </a:solidFill>
+                <a:latin typeface="Courier New" pitchFamily="34" charset="0"/>
+                <a:ea typeface="Courier New" pitchFamily="34" charset="-122"/>
+                <a:cs typeface="Courier New" pitchFamily="34" charset="-120"/>
+              </a:rPr>
+              <a:t>=</a:t>
+            </a:r>
+            <a:r>
+              <a:rPr lang="en-US" sz="950" dirty="0">
+                <a:solidFill>
+                  <a:srgbClr val="CCCCCC"/>
+                </a:solidFill>
+                <a:latin typeface="Courier New" pitchFamily="34" charset="0"/>
+                <a:ea typeface="Courier New" pitchFamily="34" charset="-122"/>
+                <a:cs typeface="Courier New" pitchFamily="34" charset="-120"/>
+              </a:rPr>
+              <a:t> </a:t>
+            </a:r>
+            <a:r>
+              <a:rPr lang="en-US" sz="950" dirty="0">
+                <a:solidFill>
+                  <a:srgbClr val="CCCCCC"/>
+                </a:solidFill>
+                <a:latin typeface="Courier New" pitchFamily="34" charset="0"/>
+                <a:ea typeface="Courier New" pitchFamily="34" charset="-122"/>
+                <a:cs typeface="Courier New" pitchFamily="34" charset="-120"/>
+              </a:rPr>
+              <a:t>abap_true</a:t>
             </a:r>
             <a:endParaRPr lang="en-US" sz="950" dirty="0"/>
           </a:p>
@@ -13078,7 +12975,7 @@
                 <a:ea typeface="Courier New" pitchFamily="34" charset="-122"/>
                 <a:cs typeface="Courier New" pitchFamily="34" charset="-120"/>
               </a:rPr>
-              <a:t>RAISE</a:t>
+              <a:t>THEN</a:t>
             </a:r>
             <a:r>
               <a:rPr lang="en-US" sz="950" dirty="0">
@@ -13094,13 +12991,13 @@
             <a:r>
               <a:rPr lang="en-US" sz="950" dirty="0">
                 <a:solidFill>
-                  <a:srgbClr val="569CD6"/>
-                </a:solidFill>
-                <a:latin typeface="Courier New" pitchFamily="34" charset="0"/>
-                <a:ea typeface="Courier New" pitchFamily="34" charset="-122"/>
-                <a:cs typeface="Courier New" pitchFamily="34" charset="-120"/>
-              </a:rPr>
-              <a:t>EXCEPTION</a:t>
+                  <a:srgbClr val="4EC9B0"/>
+                </a:solidFill>
+                <a:latin typeface="Courier New" pitchFamily="34" charset="0"/>
+                <a:ea typeface="Courier New" pitchFamily="34" charset="-122"/>
+                <a:cs typeface="Courier New" pitchFamily="34" charset="-120"/>
+              </a:rPr>
+              <a:t>if_abap_behv=&gt;</a:t>
             </a:r>
             <a:r>
               <a:rPr lang="en-US" sz="950" dirty="0">
@@ -13111,51 +13008,7 @@
                 <a:ea typeface="Courier New" pitchFamily="34" charset="-122"/>
                 <a:cs typeface="Courier New" pitchFamily="34" charset="-120"/>
               </a:rPr>
-              <a:t> </a:t>
-            </a:r>
-            <a:r>
-              <a:rPr lang="en-US" sz="950" dirty="0">
-                <a:solidFill>
-                  <a:srgbClr val="569CD6"/>
-                </a:solidFill>
-                <a:latin typeface="Courier New" pitchFamily="34" charset="0"/>
-                <a:ea typeface="Courier New" pitchFamily="34" charset="-122"/>
-                <a:cs typeface="Courier New" pitchFamily="34" charset="-120"/>
-              </a:rPr>
-              <a:t>TYPE</a:t>
-            </a:r>
-            <a:r>
-              <a:rPr lang="en-US" sz="950" dirty="0">
-                <a:solidFill>
-                  <a:srgbClr val="CCCCCC"/>
-                </a:solidFill>
-                <a:latin typeface="Courier New" pitchFamily="34" charset="0"/>
-                <a:ea typeface="Courier New" pitchFamily="34" charset="-122"/>
-                <a:cs typeface="Courier New" pitchFamily="34" charset="-120"/>
-              </a:rPr>
-              <a:t> </a:t>
-            </a:r>
-            <a:r>
-              <a:rPr lang="en-US" sz="950" dirty="0">
-                <a:solidFill>
-                  <a:srgbClr val="4EC9B0"/>
-                </a:solidFill>
-                <a:latin typeface="Courier New" pitchFamily="34" charset="0"/>
-                <a:ea typeface="Courier New" pitchFamily="34" charset="-122"/>
-                <a:cs typeface="Courier New" pitchFamily="34" charset="-120"/>
-              </a:rPr>
-              <a:t>cx_abap_invalid_value</a:t>
-            </a:r>
-            <a:r>
-              <a:rPr lang="en-US" sz="950" dirty="0">
-                <a:solidFill>
-                  <a:srgbClr val="CCCCCC"/>
-                </a:solidFill>
-                <a:latin typeface="Courier New" pitchFamily="34" charset="0"/>
-                <a:ea typeface="Courier New" pitchFamily="34" charset="-122"/>
-                <a:cs typeface="Courier New" pitchFamily="34" charset="-120"/>
-              </a:rPr>
-              <a:t>.</a:t>
+              <a:t>auth-allowed</a:t>
             </a:r>
             <a:endParaRPr lang="en-US" sz="950" dirty="0"/>
           </a:p>
@@ -13175,7 +13028,7 @@
                 <a:ea typeface="Courier New" pitchFamily="34" charset="-122"/>
                 <a:cs typeface="Courier New" pitchFamily="34" charset="-120"/>
               </a:rPr>
-              <a:t>  </a:t>
+              <a:t>    </a:t>
             </a:r>
             <a:r>
               <a:rPr lang="en-US" sz="950" dirty="0">
@@ -13186,7 +13039,62 @@
                 <a:ea typeface="Courier New" pitchFamily="34" charset="-122"/>
                 <a:cs typeface="Courier New" pitchFamily="34" charset="-120"/>
               </a:rPr>
-              <a:t>ENDIF</a:t>
+              <a:t>ELSE</a:t>
+            </a:r>
+            <a:r>
+              <a:rPr lang="en-US" sz="950" dirty="0">
+                <a:solidFill>
+                  <a:srgbClr val="CCCCCC"/>
+                </a:solidFill>
+                <a:latin typeface="Courier New" pitchFamily="34" charset="0"/>
+                <a:ea typeface="Courier New" pitchFamily="34" charset="-122"/>
+                <a:cs typeface="Courier New" pitchFamily="34" charset="-120"/>
+              </a:rPr>
+              <a:t> </a:t>
+            </a:r>
+            <a:r>
+              <a:rPr lang="en-US" sz="950" dirty="0">
+                <a:solidFill>
+                  <a:srgbClr val="4EC9B0"/>
+                </a:solidFill>
+                <a:latin typeface="Courier New" pitchFamily="34" charset="0"/>
+                <a:ea typeface="Courier New" pitchFamily="34" charset="-122"/>
+                <a:cs typeface="Courier New" pitchFamily="34" charset="-120"/>
+              </a:rPr>
+              <a:t>if_abap_behv=&gt;</a:t>
+            </a:r>
+            <a:r>
+              <a:rPr lang="en-US" sz="950" dirty="0">
+                <a:solidFill>
+                  <a:srgbClr val="CCCCCC"/>
+                </a:solidFill>
+                <a:latin typeface="Courier New" pitchFamily="34" charset="0"/>
+                <a:ea typeface="Courier New" pitchFamily="34" charset="-122"/>
+                <a:cs typeface="Courier New" pitchFamily="34" charset="-120"/>
+              </a:rPr>
+              <a:t>auth-unauthorized</a:t>
+            </a:r>
+            <a:r>
+              <a:rPr lang="en-US" sz="950" dirty="0">
+                <a:solidFill>
+                  <a:srgbClr val="CCCCCC"/>
+                </a:solidFill>
+                <a:latin typeface="Courier New" pitchFamily="34" charset="0"/>
+                <a:ea typeface="Courier New" pitchFamily="34" charset="-122"/>
+                <a:cs typeface="Courier New" pitchFamily="34" charset="-120"/>
+              </a:rPr>
+              <a:t> </a:t>
+            </a:r>
+            <a:r>
+              <a:rPr lang="en-US" sz="950" dirty="0">
+                <a:solidFill>
+                  <a:srgbClr val="CCCCCC"/>
+                </a:solidFill>
+                <a:latin typeface="Courier New" pitchFamily="34" charset="0"/>
+                <a:ea typeface="Courier New" pitchFamily="34" charset="-122"/>
+                <a:cs typeface="Courier New" pitchFamily="34" charset="-120"/>
+              </a:rPr>
+              <a:t>)</a:t>
             </a:r>
             <a:r>
               <a:rPr lang="en-US" sz="950" dirty="0">
@@ -13217,7 +13125,7 @@
                 <a:ea typeface="Courier New" pitchFamily="34" charset="-122"/>
                 <a:cs typeface="Courier New" pitchFamily="34" charset="-120"/>
               </a:rPr>
-              <a:t>ENDMETHOD</a:t>
+              <a:t>ENDIF</a:t>
             </a:r>
             <a:r>
               <a:rPr lang="en-US" sz="950" dirty="0">
@@ -13354,10 +13262,13 @@
             <a:r>
               <a:rPr lang="en-US" sz="1250" b="1" dirty="0">
                 <a:solidFill>
-                  <a:srgbClr val="1D2D3E"/>
-                </a:solidFill>
-              </a:rPr>
-              <a:t>View protegida</a:t>
+                  <a:srgbClr val="0064D9"/>
+                </a:solidFill>
+                <a:latin typeface="Courier New" pitchFamily="34" charset="0"/>
+                <a:ea typeface="Courier New" pitchFamily="34" charset="-122"/>
+                <a:cs typeface="Courier New" pitchFamily="34" charset="-120"/>
+              </a:rPr>
+              <a:t>AUTHORITY-CHECK</a:t>
             </a:r>
             <a:endParaRPr lang="en-US" sz="1400" dirty="0"/>
           </a:p>
@@ -13371,7 +13282,26 @@
                   <a:srgbClr val="556B82"/>
                 </a:solidFill>
               </a:rPr>
-              <a:t>Trocar a tabela pela CDS view com DCL já esconde o que não é permitido.</a:t>
+              <a:t>Objeto, campos e valores exigidos; o resultado vai para </a:t>
+            </a:r>
+            <a:r>
+              <a:rPr lang="en-US" sz="1050" dirty="0">
+                <a:solidFill>
+                  <a:srgbClr val="0064D9"/>
+                </a:solidFill>
+                <a:latin typeface="Courier New" pitchFamily="34" charset="0"/>
+                <a:ea typeface="Courier New" pitchFamily="34" charset="-122"/>
+                <a:cs typeface="Courier New" pitchFamily="34" charset="-120"/>
+              </a:rPr>
+              <a:t>sy-subrc</a:t>
+            </a:r>
+            <a:r>
+              <a:rPr lang="en-US" sz="1050" dirty="0">
+                <a:solidFill>
+                  <a:srgbClr val="556B82"/>
+                </a:solidFill>
+              </a:rPr>
+              <a:t>.</a:t>
             </a:r>
             <a:endParaRPr lang="en-US" sz="1400" dirty="0"/>
           </a:p>
@@ -13469,7 +13399,7 @@
                 <a:ea typeface="Courier New" pitchFamily="34" charset="-122"/>
                 <a:cs typeface="Courier New" pitchFamily="34" charset="-120"/>
               </a:rPr>
-              <a:t>AUTHORITY-CHECK</a:t>
+              <a:t>sy-subrc</a:t>
             </a:r>
             <a:endParaRPr lang="en-US" sz="1400" dirty="0"/>
           </a:p>
@@ -13483,7 +13413,7 @@
                   <a:srgbClr val="556B82"/>
                 </a:solidFill>
               </a:rPr>
-              <a:t>Objeto, campos e valores exigidos; o resultado vai para </a:t>
+              <a:t>0 autorizado; </a:t>
             </a:r>
             <a:r>
               <a:rPr lang="en-US" sz="1050" dirty="0">
@@ -13494,7 +13424,45 @@
                 <a:ea typeface="Courier New" pitchFamily="34" charset="-122"/>
                 <a:cs typeface="Courier New" pitchFamily="34" charset="-120"/>
               </a:rPr>
-              <a:t>sy-subrc</a:t>
+              <a:t>xsdbool</a:t>
+            </a:r>
+            <a:r>
+              <a:rPr lang="en-US" sz="1050" dirty="0">
+                <a:solidFill>
+                  <a:srgbClr val="556B82"/>
+                </a:solidFill>
+              </a:rPr>
+              <a:t> transforma a condição em </a:t>
+            </a:r>
+            <a:r>
+              <a:rPr lang="en-US" sz="1050" dirty="0">
+                <a:solidFill>
+                  <a:srgbClr val="0064D9"/>
+                </a:solidFill>
+                <a:latin typeface="Courier New" pitchFamily="34" charset="0"/>
+                <a:ea typeface="Courier New" pitchFamily="34" charset="-122"/>
+                <a:cs typeface="Courier New" pitchFamily="34" charset="-120"/>
+              </a:rPr>
+              <a:t>abap_true</a:t>
+            </a:r>
+            <a:r>
+              <a:rPr lang="en-US" sz="1050" dirty="0">
+                <a:solidFill>
+                  <a:srgbClr val="556B82"/>
+                </a:solidFill>
+              </a:rPr>
+              <a:t> ou </a:t>
+            </a:r>
+            <a:r>
+              <a:rPr lang="en-US" sz="1050" dirty="0">
+                <a:solidFill>
+                  <a:srgbClr val="0064D9"/>
+                </a:solidFill>
+                <a:latin typeface="Courier New" pitchFamily="34" charset="0"/>
+                <a:ea typeface="Courier New" pitchFamily="34" charset="-122"/>
+                <a:cs typeface="Courier New" pitchFamily="34" charset="-120"/>
+              </a:rPr>
+              <a:t>abap_false</a:t>
             </a:r>
             <a:r>
               <a:rPr lang="en-US" sz="1050" dirty="0">
@@ -13594,13 +13562,10 @@
             <a:r>
               <a:rPr lang="en-US" sz="1250" b="1" dirty="0">
                 <a:solidFill>
-                  <a:srgbClr val="0064D9"/>
-                </a:solidFill>
-                <a:latin typeface="Courier New" pitchFamily="34" charset="0"/>
-                <a:ea typeface="Courier New" pitchFamily="34" charset="-122"/>
-                <a:cs typeface="Courier New" pitchFamily="34" charset="-120"/>
-              </a:rPr>
-              <a:t>sy-subrc</a:t>
+                  <a:srgbClr val="1D2D3E"/>
+                </a:solidFill>
+              </a:rPr>
+              <a:t>Uma atividade por operação</a:t>
             </a:r>
             <a:endParaRPr lang="en-US" sz="1400" dirty="0"/>
           </a:p>
@@ -13614,7 +13579,7 @@
                   <a:srgbClr val="556B82"/>
                 </a:solidFill>
               </a:rPr>
-              <a:t>0 autorizado; qualquer outro valor, não autorizado ou objeto mal definido.</a:t>
+              <a:t>Criar 01, alterar 02, excluir 06, executar ações 16: nunca uma atividade genérica.</a:t>
             </a:r>
             <a:endParaRPr lang="en-US" sz="1400" dirty="0"/>
           </a:p>
@@ -13709,7 +13674,7 @@
                   <a:srgbClr val="1D2D3E"/>
                 </a:solidFill>
               </a:rPr>
-              <a:t>Mensagem certa</a:t>
+              <a:t>No RAP</a:t>
             </a:r>
             <a:endParaRPr lang="en-US" sz="1400" dirty="0"/>
           </a:p>
@@ -13720,10 +13685,59 @@
             <a:r>
               <a:rPr lang="en-US" sz="1050" dirty="0">
                 <a:solidFill>
+                  <a:srgbClr val="0064D9"/>
+                </a:solidFill>
+                <a:latin typeface="Courier New" pitchFamily="34" charset="0"/>
+                <a:ea typeface="Courier New" pitchFamily="34" charset="-122"/>
+                <a:cs typeface="Courier New" pitchFamily="34" charset="-120"/>
+              </a:rPr>
+              <a:t>get_global_authorizations</a:t>
+            </a:r>
+            <a:r>
+              <a:rPr lang="en-US" sz="1050" dirty="0">
+                <a:solidFill>
                   <a:srgbClr val="556B82"/>
                 </a:solidFill>
               </a:rPr>
-              <a:t>O usuário sabe se o dado não existe ou se falta permissão.</a:t>
+              <a:t> devolve </a:t>
+            </a:r>
+            <a:r>
+              <a:rPr lang="en-US" sz="1050" dirty="0">
+                <a:solidFill>
+                  <a:srgbClr val="0064D9"/>
+                </a:solidFill>
+                <a:latin typeface="Courier New" pitchFamily="34" charset="0"/>
+                <a:ea typeface="Courier New" pitchFamily="34" charset="-122"/>
+                <a:cs typeface="Courier New" pitchFamily="34" charset="-120"/>
+              </a:rPr>
+              <a:t>auth-allowed</a:t>
+            </a:r>
+            <a:r>
+              <a:rPr lang="en-US" sz="1050" dirty="0">
+                <a:solidFill>
+                  <a:srgbClr val="556B82"/>
+                </a:solidFill>
+              </a:rPr>
+              <a:t> ou </a:t>
+            </a:r>
+            <a:r>
+              <a:rPr lang="en-US" sz="1050" dirty="0">
+                <a:solidFill>
+                  <a:srgbClr val="0064D9"/>
+                </a:solidFill>
+                <a:latin typeface="Courier New" pitchFamily="34" charset="0"/>
+                <a:ea typeface="Courier New" pitchFamily="34" charset="-122"/>
+                <a:cs typeface="Courier New" pitchFamily="34" charset="-120"/>
+              </a:rPr>
+              <a:t>auth-unauthorized</a:t>
+            </a:r>
+            <a:r>
+              <a:rPr lang="en-US" sz="1050" dirty="0">
+                <a:solidFill>
+                  <a:srgbClr val="556B82"/>
+                </a:solidFill>
+              </a:rPr>
+              <a:t>, e o app esconde o botão.</a:t>
             </a:r>
             <a:endParaRPr lang="en-US" sz="1400" dirty="0"/>
           </a:p>
